--- a/FXG_Load_Performance.pptx
+++ b/FXG_Load_Performance.pptx
@@ -4,13 +4,13 @@
   <p:sldMasterIdLst>
     <p:sldMasterId id="2147483648" r:id="rId1"/>
   </p:sldMasterIdLst>
+  <p:notesMasterIdLst>
+    <p:notesMasterId r:id="rId4"/>
+  </p:notesMasterIdLst>
   <p:sldIdLst>
     <p:sldId id="256" r:id="rId2"/>
     <p:sldId id="257" r:id="rId3"/>
   </p:sldIdLst>
-  <p:notesMasterIdLst>
-    <p:notesMasterId r:id="rId4"/>
-  </p:notesMasterIdLst>
   <p:sldSz cx="12192000" cy="6858000"/>
   <p:notesSz cx="6858000" cy="12192000"/>
   <p:defaultTextStyle>
@@ -105,7 +105,20 @@
       </a:defRPr>
     </a:lvl9pPr>
   </p:defaultTextStyle>
+  <p:extLst>
+    <p:ext uri="{EFAFB233-063F-42B5-8137-9DF3F51BA10A}">
+      <p15:sldGuideLst xmlns:p15="http://schemas.microsoft.com/office/powerpoint/2012/main"/>
+    </p:ext>
+  </p:extLst>
 </p:presentation>
+</file>
+
+<file path=ppt/revisionInfo.xml><?xml version="1.0" encoding="utf-8"?>
+<p1510:revInfo xmlns:a="http://schemas.openxmlformats.org/drawingml/2006/main" xmlns:r="http://schemas.openxmlformats.org/officeDocument/2006/relationships" xmlns:p1510="http://schemas.microsoft.com/office/powerpoint/2015/10/main">
+  <p1510:revLst>
+    <p1510:client id="{85AD3079-969D-46E7-B8CA-69D1CFCF1F2B}" v="19" dt="2026-08-06T07:27:46.695"/>
+  </p1510:revLst>
+</p1510:revInfo>
 </file>
 
 <file path=ppt/notesMasters/notesMaster1.xml><?xml version="1.0" encoding="utf-8"?>
@@ -130,234 +143,10 @@
           <a:chExt cx="0" cy="0"/>
         </a:xfrm>
       </p:grpSpPr>
-      <p:sp>
-        <p:nvSpPr>
-          <p:cNvPr id="2" name="Header Placeholder 1"/>
-          <p:cNvSpPr>
-            <a:spLocks noGrp="1"/>
-          </p:cNvSpPr>
-          <p:nvPr>
-            <p:ph type="hdr" sz="quarter"/>
-          </p:nvPr>
-        </p:nvSpPr>
-        <p:spPr>
-          <a:xfrm>
-            <a:off x="0" y="0"/>
-            <a:ext cx="2971800" cy="458788"/>
-          </a:xfrm>
-          <a:prstGeom prst="rect">
-            <a:avLst/>
-          </a:prstGeom>
-        </p:spPr>
-        <p:txBody>
-          <a:bodyPr vert="horz" lIns="91440" tIns="45720" rIns="91440" bIns="45720" rtlCol="0"/>
-          <a:lstStyle>
-            <a:lvl1pPr algn="l">
-              <a:defRPr sz="1200"/>
-            </a:lvl1pPr>
-          </a:lstStyle>
-          <a:p>
-            <a:endParaRPr lang="en-US"/>
-          </a:p>
-        </p:txBody>
-      </p:sp>
-      <p:sp>
-        <p:nvSpPr>
-          <p:cNvPr id="3" name="Date Placeholder 2"/>
-          <p:cNvSpPr>
-            <a:spLocks noGrp="1"/>
-          </p:cNvSpPr>
-          <p:nvPr>
-            <p:ph type="dt" idx="1"/>
-          </p:nvPr>
-        </p:nvSpPr>
-        <p:spPr>
-          <a:xfrm>
-            <a:off x="3884613" y="0"/>
-            <a:ext cx="2971800" cy="458788"/>
-          </a:xfrm>
-          <a:prstGeom prst="rect">
-            <a:avLst/>
-          </a:prstGeom>
-        </p:spPr>
-        <p:txBody>
-          <a:bodyPr vert="horz" lIns="91440" tIns="45720" rIns="91440" bIns="45720" rtlCol="0"/>
-          <a:lstStyle>
-            <a:lvl1pPr algn="r">
-              <a:defRPr sz="1200"/>
-            </a:lvl1pPr>
-          </a:lstStyle>
-          <a:p>
-            <a:fld id="{5282F153-3F37-0F45-9E97-73ACFA13230C}" type="datetimeFigureOut">
-              <a:rPr lang="en-US"/>
-              <a:t>7/23/19</a:t>
-            </a:fld>
-            <a:endParaRPr lang="en-US"/>
-          </a:p>
-        </p:txBody>
-      </p:sp>
-      <p:sp>
-        <p:nvSpPr>
-          <p:cNvPr id="4" name="Slide Image Placeholder 3"/>
-          <p:cNvSpPr>
-            <a:spLocks noGrp="1" noRot="1" noChangeAspect="1"/>
-          </p:cNvSpPr>
-          <p:nvPr>
-            <p:ph type="sldImg" idx="2"/>
-          </p:nvPr>
-        </p:nvSpPr>
-        <p:spPr>
-          <a:xfrm>
-            <a:off x="685800" y="1143000"/>
-            <a:ext cx="5486400" cy="3086100"/>
-          </a:xfrm>
-          <a:prstGeom prst="rect">
-            <a:avLst/>
-          </a:prstGeom>
-          <a:noFill/>
-          <a:ln w="12700">
-            <a:solidFill>
-              <a:prstClr val="black"/>
-            </a:solidFill>
-          </a:ln>
-        </p:spPr>
-        <p:txBody>
-          <a:bodyPr vert="horz" lIns="91440" tIns="45720" rIns="91440" bIns="45720" rtlCol="0" anchor="ctr"/>
-          <a:lstStyle/>
-          <a:p>
-            <a:endParaRPr lang="en-US"/>
-          </a:p>
-        </p:txBody>
-      </p:sp>
-      <p:sp>
-        <p:nvSpPr>
-          <p:cNvPr id="5" name="Notes Placeholder 4"/>
-          <p:cNvSpPr>
-            <a:spLocks noGrp="1"/>
-          </p:cNvSpPr>
-          <p:nvPr>
-            <p:ph type="body" sz="quarter" idx="3"/>
-          </p:nvPr>
-        </p:nvSpPr>
-        <p:spPr>
-          <a:xfrm>
-            <a:off x="685800" y="4400550"/>
-            <a:ext cx="5486400" cy="3600450"/>
-          </a:xfrm>
-          <a:prstGeom prst="rect">
-            <a:avLst/>
-          </a:prstGeom>
-        </p:spPr>
-        <p:txBody>
-          <a:bodyPr vert="horz" lIns="91440" tIns="45720" rIns="91440" bIns="45720" rtlCol="0"/>
-          <a:lstStyle/>
-          <a:p>
-            <a:pPr lvl="0"/>
-            <a:r>
-              <a:rPr lang="en-US"/>
-              <a:t>Click to edit Master text styles</a:t>
-            </a:r>
-          </a:p>
-          <a:p>
-            <a:pPr lvl="1"/>
-            <a:r>
-              <a:rPr lang="en-US"/>
-              <a:t>Second level</a:t>
-            </a:r>
-          </a:p>
-          <a:p>
-            <a:pPr lvl="2"/>
-            <a:r>
-              <a:rPr lang="en-US"/>
-              <a:t>Third level</a:t>
-            </a:r>
-          </a:p>
-          <a:p>
-            <a:pPr lvl="3"/>
-            <a:r>
-              <a:rPr lang="en-US"/>
-              <a:t>Fourth level</a:t>
-            </a:r>
-          </a:p>
-          <a:p>
-            <a:pPr lvl="4"/>
-            <a:r>
-              <a:rPr lang="en-US"/>
-              <a:t>Fifth level</a:t>
-            </a:r>
-          </a:p>
-        </p:txBody>
-      </p:sp>
-      <p:sp>
-        <p:nvSpPr>
-          <p:cNvPr id="6" name="Footer Placeholder 5"/>
-          <p:cNvSpPr>
-            <a:spLocks noGrp="1"/>
-          </p:cNvSpPr>
-          <p:nvPr>
-            <p:ph type="ftr" sz="quarter" idx="4"/>
-          </p:nvPr>
-        </p:nvSpPr>
-        <p:spPr>
-          <a:xfrm>
-            <a:off x="0" y="8685213"/>
-            <a:ext cx="2971800" cy="458787"/>
-          </a:xfrm>
-          <a:prstGeom prst="rect">
-            <a:avLst/>
-          </a:prstGeom>
-        </p:spPr>
-        <p:txBody>
-          <a:bodyPr vert="horz" lIns="91440" tIns="45720" rIns="91440" bIns="45720" rtlCol="0" anchor="b"/>
-          <a:lstStyle>
-            <a:lvl1pPr algn="l">
-              <a:defRPr sz="1200"/>
-            </a:lvl1pPr>
-          </a:lstStyle>
-          <a:p>
-            <a:endParaRPr lang="en-US"/>
-          </a:p>
-        </p:txBody>
-      </p:sp>
-      <p:sp>
-        <p:nvSpPr>
-          <p:cNvPr id="7" name="Slide Number Placeholder 6"/>
-          <p:cNvSpPr>
-            <a:spLocks noGrp="1"/>
-          </p:cNvSpPr>
-          <p:nvPr>
-            <p:ph type="sldNum" sz="quarter" idx="5"/>
-          </p:nvPr>
-        </p:nvSpPr>
-        <p:spPr>
-          <a:xfrm>
-            <a:off x="3884613" y="8685213"/>
-            <a:ext cx="2971800" cy="458787"/>
-          </a:xfrm>
-          <a:prstGeom prst="rect">
-            <a:avLst/>
-          </a:prstGeom>
-        </p:spPr>
-        <p:txBody>
-          <a:bodyPr vert="horz" lIns="91440" tIns="45720" rIns="91440" bIns="45720" rtlCol="0" anchor="b"/>
-          <a:lstStyle>
-            <a:lvl1pPr algn="r">
-              <a:defRPr sz="1200"/>
-            </a:lvl1pPr>
-          </a:lstStyle>
-          <a:p>
-            <a:fld id="{CE5E9CC1-C706-0F49-92D6-E571CC5EEA8F}" type="slidenum">
-              <a:rPr lang="en-US"/>
-              <a:t>‹#›</a:t>
-            </a:fld>
-            <a:endParaRPr lang="en-US"/>
-          </a:p>
-        </p:txBody>
-      </p:sp>
     </p:spTree>
     <p:extLst>
       <p:ext uri="{BB962C8B-B14F-4D97-AF65-F5344CB8AC3E}">
-        <p14:creationId xmlns:p14="http://schemas.microsoft.com/office/powerpoint/2010/main" val="1024086991"/>
+        <p14:creationId xmlns:p14="http://schemas.microsoft.com/office/powerpoint/2010/main" val="2481933105"/>
       </p:ext>
     </p:extLst>
   </p:cSld>
@@ -501,10 +290,6 @@
           <a:bodyPr/>
           <a:lstStyle/>
           <a:p>
-            <a:r>
-              <a:rPr lang="en-US" dirty="0"/>
-              <a:t/>
-            </a:r>
             <a:endParaRPr lang="en-US" dirty="0"/>
           </a:p>
         </p:txBody>
@@ -589,10 +374,6 @@
           <a:bodyPr/>
           <a:lstStyle/>
           <a:p>
-            <a:r>
-              <a:rPr lang="en-US" dirty="0"/>
-              <a:t/>
-            </a:r>
             <a:endParaRPr lang="en-US" dirty="0"/>
           </a:p>
         </p:txBody>
@@ -666,6 +447,11 @@
 <file path=ppt/slideMasters/slideMaster1.xml><?xml version="1.0" encoding="utf-8"?>
 <p:sldMaster xmlns:a="http://schemas.openxmlformats.org/drawingml/2006/main" xmlns:r="http://schemas.openxmlformats.org/officeDocument/2006/relationships" xmlns:p="http://schemas.openxmlformats.org/presentationml/2006/main">
   <p:cSld>
+    <p:bg>
+      <p:bgRef idx="1001">
+        <a:schemeClr val="bg1"/>
+      </p:bgRef>
+    </p:bg>
     <p:spTree>
       <p:nvGrpSpPr>
         <p:cNvPr id="1" name=""/>
@@ -948,6 +734,7 @@
         <a:solidFill>
           <a:srgbClr val="FFFFFF"/>
         </a:solidFill>
+        <a:effectLst/>
       </p:bgPr>
     </p:bg>
     <p:spTree>
@@ -964,108 +751,6 @@
           <a:chExt cx="0" cy="0"/>
         </a:xfrm>
       </p:grpSpPr>
-      <p:pic>
-        <p:nvPicPr>
-          <p:cNvPr id="2" name="Image 0" descr="/home/claude/icons/header_gradient.png">    </p:cNvPr>
-          <p:cNvPicPr>
-            <a:picLocks noChangeAspect="1"/>
-          </p:cNvPicPr>
-          <p:nvPr/>
-        </p:nvPicPr>
-        <p:blipFill>
-          <a:blip r:embed="rId1"/>
-          <a:stretch>
-            <a:fillRect/>
-          </a:stretch>
-        </p:blipFill>
-        <p:spPr>
-          <a:xfrm>
-            <a:off x="0" y="0"/>
-            <a:ext cx="12191695" cy="658368"/>
-          </a:xfrm>
-          <a:prstGeom prst="rect">
-            <a:avLst/>
-          </a:prstGeom>
-        </p:spPr>
-      </p:pic>
-      <p:sp>
-        <p:nvSpPr>
-          <p:cNvPr id="3" name="Text 0"/>
-          <p:cNvSpPr/>
-          <p:nvPr/>
-        </p:nvSpPr>
-        <p:spPr>
-          <a:xfrm>
-            <a:off x="365760" y="0"/>
-            <a:ext cx="8229600" cy="658368"/>
-          </a:xfrm>
-          <a:prstGeom prst="rect">
-            <a:avLst/>
-          </a:prstGeom>
-          <a:noFill/>
-          <a:ln/>
-        </p:spPr>
-        <p:txBody>
-          <a:bodyPr wrap="square" lIns="0" tIns="0" rIns="0" bIns="0" rtlCol="0" anchor="ctr"/>
-          <a:lstStyle/>
-          <a:p>
-            <a:pPr indent="0" marL="0">
-              <a:buNone/>
-            </a:pPr>
-            <a:r>
-              <a:rPr lang="en-US" sz="2200" b="1" dirty="0">
-                <a:solidFill>
-                  <a:srgbClr val="FFFFFF"/>
-                </a:solidFill>
-                <a:latin typeface="Calibri" pitchFamily="34" charset="0"/>
-                <a:ea typeface="Calibri" pitchFamily="34" charset="-122"/>
-                <a:cs typeface="Calibri" pitchFamily="34" charset="-120"/>
-              </a:rPr>
-              <a:t>FXG Data Pipeline — Load Performance</a:t>
-            </a:r>
-            <a:endParaRPr lang="en-US" sz="2200" dirty="0"/>
-          </a:p>
-        </p:txBody>
-      </p:sp>
-      <p:sp>
-        <p:nvSpPr>
-          <p:cNvPr id="4" name="Text 1"/>
-          <p:cNvSpPr/>
-          <p:nvPr/>
-        </p:nvSpPr>
-        <p:spPr>
-          <a:xfrm>
-            <a:off x="365760" y="786384"/>
-            <a:ext cx="8229600" cy="256032"/>
-          </a:xfrm>
-          <a:prstGeom prst="rect">
-            <a:avLst/>
-          </a:prstGeom>
-          <a:noFill/>
-          <a:ln/>
-        </p:spPr>
-        <p:txBody>
-          <a:bodyPr wrap="square" lIns="0" tIns="0" rIns="0" bIns="0" rtlCol="0" anchor="ctr"/>
-          <a:lstStyle/>
-          <a:p>
-            <a:pPr indent="0" marL="0">
-              <a:buNone/>
-            </a:pPr>
-            <a:r>
-              <a:rPr lang="en-US" sz="1100" b="1" spc="200" kern="0" dirty="0">
-                <a:solidFill>
-                  <a:srgbClr val="FF6600"/>
-                </a:solidFill>
-                <a:latin typeface="Calibri" pitchFamily="34" charset="0"/>
-                <a:ea typeface="Calibri" pitchFamily="34" charset="-122"/>
-                <a:cs typeface="Calibri" pitchFamily="34" charset="-120"/>
-              </a:rPr>
-              <a:t>SECTION 01 · LOAD TIME COMPARISON</a:t>
-            </a:r>
-            <a:endParaRPr lang="en-US" sz="1100" dirty="0"/>
-          </a:p>
-        </p:txBody>
-      </p:sp>
       <p:sp>
         <p:nvSpPr>
           <p:cNvPr id="5" name="Text 2"/>
@@ -1074,7 +759,7 @@
         </p:nvSpPr>
         <p:spPr>
           <a:xfrm>
-            <a:off x="365760" y="1042416"/>
+            <a:off x="213055" y="9144"/>
             <a:ext cx="11430000" cy="457200"/>
           </a:xfrm>
           <a:prstGeom prst="rect">
@@ -1087,7 +772,7 @@
           <a:bodyPr wrap="square" lIns="0" tIns="0" rIns="0" bIns="0" rtlCol="0" anchor="ctr"/>
           <a:lstStyle/>
           <a:p>
-            <a:pPr indent="0" marL="0">
+            <a:pPr marL="0" indent="0">
               <a:buNone/>
             </a:pPr>
             <a:r>
@@ -1099,7 +784,7 @@
                 <a:ea typeface="Calibri" pitchFamily="34" charset="-122"/>
                 <a:cs typeface="Calibri" pitchFamily="34" charset="-120"/>
               </a:rPr>
-              <a:t>Monthly &amp; Daily Load — On-Prem vs. Cloud</a:t>
+              <a:t>Load performance comparison</a:t>
             </a:r>
             <a:endParaRPr lang="en-US" sz="2400" dirty="0"/>
           </a:p>
@@ -1113,7 +798,7 @@
         </p:nvSpPr>
         <p:spPr>
           <a:xfrm>
-            <a:off x="365760" y="1463040"/>
+            <a:off x="213055" y="374904"/>
             <a:ext cx="11430000" cy="310896"/>
           </a:xfrm>
           <a:prstGeom prst="rect">
@@ -1126,7 +811,7 @@
           <a:bodyPr wrap="square" lIns="0" tIns="0" rIns="0" bIns="0" rtlCol="0" anchor="ctr"/>
           <a:lstStyle/>
           <a:p>
-            <a:pPr indent="0" marL="0">
+            <a:pPr marL="0" indent="0">
               <a:buNone/>
             </a:pPr>
             <a:r>
@@ -1138,7 +823,7 @@
                 <a:ea typeface="Calibri" pitchFamily="34" charset="-122"/>
                 <a:cs typeface="Calibri" pitchFamily="34" charset="-120"/>
               </a:rPr>
-              <a:t>Per-table load time across three approaches: on-prem MKVW, Azure Data Factory (ADF), and native Python on cloud (Azure/GCP)</a:t>
+              <a:t>Per-table load time across three layers with three approaches: on-prem MKVW, Azure Data Factory (ADF), and native Python on cloud (Azure/GCP)</a:t>
             </a:r>
             <a:endParaRPr lang="en-US" sz="1250" dirty="0"/>
           </a:p>
@@ -1152,7 +837,7 @@
         </p:nvSpPr>
         <p:spPr>
           <a:xfrm>
-            <a:off x="365760" y="1810512"/>
+            <a:off x="213055" y="640080"/>
             <a:ext cx="5486400" cy="237744"/>
           </a:xfrm>
           <a:prstGeom prst="rect">
@@ -1165,7 +850,7 @@
           <a:bodyPr wrap="square" lIns="0" tIns="0" rIns="0" bIns="0" rtlCol="0" anchor="ctr"/>
           <a:lstStyle/>
           <a:p>
-            <a:pPr indent="0" marL="0">
+            <a:pPr marL="0" indent="0">
               <a:buNone/>
             </a:pPr>
             <a:r>
@@ -1191,8 +876,8 @@
         </p:nvSpPr>
         <p:spPr>
           <a:xfrm>
-            <a:off x="365760" y="2084832"/>
-            <a:ext cx="3649370" cy="1115568"/>
+            <a:off x="210312" y="1088136"/>
+            <a:ext cx="2624328" cy="2205736"/>
           </a:xfrm>
           <a:prstGeom prst="roundRect">
             <a:avLst>
@@ -1209,6 +894,13 @@
             <a:prstDash val="solid"/>
           </a:ln>
         </p:spPr>
+        <p:txBody>
+          <a:bodyPr/>
+          <a:lstStyle/>
+          <a:p>
+            <a:endParaRPr lang="en-IN" dirty="0"/>
+          </a:p>
+        </p:txBody>
       </p:sp>
       <p:sp>
         <p:nvSpPr>
@@ -1218,7 +910,7 @@
         </p:nvSpPr>
         <p:spPr>
           <a:xfrm>
-            <a:off x="585216" y="2212848"/>
+            <a:off x="393192" y="1159662"/>
             <a:ext cx="402336" cy="402336"/>
           </a:xfrm>
           <a:prstGeom prst="ellipse">
@@ -1229,24 +921,31 @@
           </a:solidFill>
           <a:ln/>
         </p:spPr>
+        <p:txBody>
+          <a:bodyPr/>
+          <a:lstStyle/>
+          <a:p>
+            <a:endParaRPr lang="en-IN"/>
+          </a:p>
+        </p:txBody>
       </p:sp>
       <p:pic>
         <p:nvPicPr>
-          <p:cNvPr id="10" name="Image 1" descr="/home/claude/icons/server_white.png">    </p:cNvPr>
+          <p:cNvPr id="10" name="Image 1" descr="/home/claude/icons/server_white.png"/>
           <p:cNvPicPr>
             <a:picLocks noChangeAspect="1"/>
           </p:cNvPicPr>
           <p:nvPr/>
         </p:nvPicPr>
         <p:blipFill>
-          <a:blip r:embed="rId2"/>
+          <a:blip r:embed="rId3"/>
           <a:stretch>
             <a:fillRect/>
           </a:stretch>
         </p:blipFill>
         <p:spPr>
           <a:xfrm>
-            <a:off x="675742" y="2303374"/>
+            <a:off x="483718" y="1250188"/>
             <a:ext cx="221285" cy="221285"/>
           </a:xfrm>
           <a:prstGeom prst="rect">
@@ -1262,7 +961,7 @@
         </p:nvSpPr>
         <p:spPr>
           <a:xfrm>
-            <a:off x="1078992" y="2231136"/>
+            <a:off x="886968" y="1177950"/>
             <a:ext cx="2780690" cy="329184"/>
           </a:xfrm>
           <a:prstGeom prst="rect">
@@ -1275,7 +974,7 @@
           <a:bodyPr wrap="square" lIns="0" tIns="0" rIns="0" bIns="0" rtlCol="0" anchor="ctr"/>
           <a:lstStyle/>
           <a:p>
-            <a:pPr indent="0" marL="0">
+            <a:pPr marL="0" indent="0">
               <a:buNone/>
             </a:pPr>
             <a:r>
@@ -1301,8 +1000,8 @@
         </p:nvSpPr>
         <p:spPr>
           <a:xfrm>
-            <a:off x="548640" y="2596896"/>
-            <a:ext cx="3283610" cy="548640"/>
+            <a:off x="393192" y="2012696"/>
+            <a:ext cx="2122424" cy="548640"/>
           </a:xfrm>
           <a:prstGeom prst="rect">
             <a:avLst/>
@@ -1314,7 +1013,7 @@
           <a:bodyPr wrap="square" lIns="0" tIns="0" rIns="0" bIns="0" rtlCol="0" anchor="ctr"/>
           <a:lstStyle/>
           <a:p>
-            <a:pPr algn="ctr" indent="0" marL="0">
+            <a:pPr marL="0" indent="0" algn="ctr">
               <a:buNone/>
             </a:pPr>
             <a:r>
@@ -1331,7 +1030,7 @@
             <a:endParaRPr lang="en-US" sz="1600" dirty="0"/>
           </a:p>
           <a:p>
-            <a:pPr algn="ctr" indent="0" marL="0">
+            <a:pPr marL="0" indent="0" algn="ctr">
               <a:buNone/>
             </a:pPr>
             <a:r>
@@ -1357,8 +1056,8 @@
         </p:nvSpPr>
         <p:spPr>
           <a:xfrm>
-            <a:off x="4271162" y="2084832"/>
-            <a:ext cx="3649370" cy="1115568"/>
+            <a:off x="3159709" y="1051560"/>
+            <a:ext cx="4031336" cy="2569464"/>
           </a:xfrm>
           <a:prstGeom prst="roundRect">
             <a:avLst>
@@ -1375,6 +1074,13 @@
             <a:prstDash val="solid"/>
           </a:ln>
         </p:spPr>
+        <p:txBody>
+          <a:bodyPr/>
+          <a:lstStyle/>
+          <a:p>
+            <a:endParaRPr lang="en-IN" dirty="0"/>
+          </a:p>
+        </p:txBody>
       </p:sp>
       <p:sp>
         <p:nvSpPr>
@@ -1384,7 +1090,7 @@
         </p:nvSpPr>
         <p:spPr>
           <a:xfrm>
-            <a:off x="4490618" y="2212848"/>
+            <a:off x="3379165" y="1179576"/>
             <a:ext cx="402336" cy="402336"/>
           </a:xfrm>
           <a:prstGeom prst="ellipse">
@@ -1395,24 +1101,31 @@
           </a:solidFill>
           <a:ln/>
         </p:spPr>
+        <p:txBody>
+          <a:bodyPr/>
+          <a:lstStyle/>
+          <a:p>
+            <a:endParaRPr lang="en-IN"/>
+          </a:p>
+        </p:txBody>
       </p:sp>
       <p:pic>
         <p:nvPicPr>
-          <p:cNvPr id="15" name="Image 2" descr="/home/claude/icons/cloud_white.png">    </p:cNvPr>
+          <p:cNvPr id="15" name="Image 2" descr="/home/claude/icons/cloud_white.png"/>
           <p:cNvPicPr>
             <a:picLocks noChangeAspect="1"/>
           </p:cNvPicPr>
           <p:nvPr/>
         </p:nvPicPr>
         <p:blipFill>
-          <a:blip r:embed="rId3"/>
+          <a:blip r:embed="rId4"/>
           <a:stretch>
             <a:fillRect/>
           </a:stretch>
         </p:blipFill>
         <p:spPr>
           <a:xfrm>
-            <a:off x="4581144" y="2303374"/>
+            <a:off x="3469691" y="1270102"/>
             <a:ext cx="221285" cy="221285"/>
           </a:xfrm>
           <a:prstGeom prst="rect">
@@ -1428,7 +1141,7 @@
         </p:nvSpPr>
         <p:spPr>
           <a:xfrm>
-            <a:off x="4984394" y="2231136"/>
+            <a:off x="3872941" y="1197864"/>
             <a:ext cx="2780690" cy="329184"/>
           </a:xfrm>
           <a:prstGeom prst="rect">
@@ -1441,7 +1154,7 @@
           <a:bodyPr wrap="square" lIns="0" tIns="0" rIns="0" bIns="0" rtlCol="0" anchor="ctr"/>
           <a:lstStyle/>
           <a:p>
-            <a:pPr indent="0" marL="0">
+            <a:pPr marL="0" indent="0">
               <a:buNone/>
             </a:pPr>
             <a:r>
@@ -1467,7 +1180,7 @@
         </p:nvSpPr>
         <p:spPr>
           <a:xfrm>
-            <a:off x="4454042" y="2596896"/>
+            <a:off x="3342589" y="1563624"/>
             <a:ext cx="3283610" cy="402336"/>
           </a:xfrm>
           <a:prstGeom prst="rect">
@@ -1480,7 +1193,7 @@
           <a:bodyPr wrap="square" lIns="0" tIns="0" rIns="0" bIns="0" rtlCol="0" anchor="ctr"/>
           <a:lstStyle/>
           <a:p>
-            <a:pPr algn="ctr" indent="0" marL="0">
+            <a:pPr marL="0" indent="0" algn="ctr">
               <a:buNone/>
             </a:pPr>
             <a:r>
@@ -1492,48 +1205,20 @@
                 <a:ea typeface="Calibri" pitchFamily="34" charset="-122"/>
                 <a:cs typeface="Calibri" pitchFamily="34" charset="-120"/>
               </a:rPr>
-              <a:t>20 min</a:t>
+              <a:t>20 min </a:t>
             </a:r>
-            <a:endParaRPr lang="en-US" sz="2300" dirty="0"/>
-          </a:p>
-        </p:txBody>
-      </p:sp>
-      <p:sp>
-        <p:nvSpPr>
-          <p:cNvPr id="18" name="Text 13"/>
-          <p:cNvSpPr/>
-          <p:nvPr/>
-        </p:nvSpPr>
-        <p:spPr>
-          <a:xfrm>
-            <a:off x="4454042" y="2999232"/>
-            <a:ext cx="3283610" cy="182880"/>
-          </a:xfrm>
-          <a:prstGeom prst="rect">
-            <a:avLst/>
-          </a:prstGeom>
-          <a:noFill/>
-          <a:ln/>
-        </p:spPr>
-        <p:txBody>
-          <a:bodyPr wrap="square" lIns="0" tIns="0" rIns="0" bIns="0" rtlCol="0" anchor="ctr"/>
-          <a:lstStyle/>
-          <a:p>
-            <a:pPr algn="ctr" indent="0" marL="0">
-              <a:buNone/>
-            </a:pPr>
             <a:r>
-              <a:rPr lang="en-US" sz="900" dirty="0">
+              <a:rPr lang="en-US" sz="1100" b="1" dirty="0">
                 <a:solidFill>
-                  <a:srgbClr val="4A4A4A"/>
+                  <a:srgbClr val="4D148C"/>
                 </a:solidFill>
                 <a:latin typeface="Calibri" pitchFamily="34" charset="0"/>
                 <a:ea typeface="Calibri" pitchFamily="34" charset="-122"/>
                 <a:cs typeface="Calibri" pitchFamily="34" charset="-120"/>
               </a:rPr>
-              <a:t>per table / month</a:t>
+              <a:t>per table/month</a:t>
             </a:r>
-            <a:endParaRPr lang="en-US" sz="900" dirty="0"/>
+            <a:endParaRPr lang="en-US" sz="2300" dirty="0"/>
           </a:p>
         </p:txBody>
       </p:sp>
@@ -1545,8 +1230,8 @@
         </p:nvSpPr>
         <p:spPr>
           <a:xfrm>
-            <a:off x="8176565" y="2084832"/>
-            <a:ext cx="3649370" cy="1115568"/>
+            <a:off x="7546645" y="1051559"/>
+            <a:ext cx="3649370" cy="2556287"/>
           </a:xfrm>
           <a:prstGeom prst="roundRect">
             <a:avLst>
@@ -1558,6 +1243,13 @@
           </a:solidFill>
           <a:ln/>
         </p:spPr>
+        <p:txBody>
+          <a:bodyPr/>
+          <a:lstStyle/>
+          <a:p>
+            <a:endParaRPr lang="en-IN"/>
+          </a:p>
+        </p:txBody>
       </p:sp>
       <p:sp>
         <p:nvSpPr>
@@ -1567,7 +1259,7 @@
         </p:nvSpPr>
         <p:spPr>
           <a:xfrm>
-            <a:off x="8396021" y="2212848"/>
+            <a:off x="7766101" y="1179576"/>
             <a:ext cx="402336" cy="402336"/>
           </a:xfrm>
           <a:prstGeom prst="ellipse">
@@ -1578,24 +1270,31 @@
           </a:solidFill>
           <a:ln/>
         </p:spPr>
+        <p:txBody>
+          <a:bodyPr/>
+          <a:lstStyle/>
+          <a:p>
+            <a:endParaRPr lang="en-IN"/>
+          </a:p>
+        </p:txBody>
       </p:sp>
       <p:pic>
         <p:nvPicPr>
-          <p:cNvPr id="21" name="Image 3" descr="/home/claude/icons/zap_white.png">    </p:cNvPr>
+          <p:cNvPr id="21" name="Image 3" descr="/home/claude/icons/zap_white.png"/>
           <p:cNvPicPr>
             <a:picLocks noChangeAspect="1"/>
           </p:cNvPicPr>
           <p:nvPr/>
         </p:nvPicPr>
         <p:blipFill>
-          <a:blip r:embed="rId4"/>
+          <a:blip r:embed="rId5"/>
           <a:stretch>
             <a:fillRect/>
           </a:stretch>
         </p:blipFill>
         <p:spPr>
           <a:xfrm>
-            <a:off x="8486546" y="2303374"/>
+            <a:off x="7856626" y="1270102"/>
             <a:ext cx="221285" cy="221285"/>
           </a:xfrm>
           <a:prstGeom prst="rect">
@@ -1611,7 +1310,7 @@
         </p:nvSpPr>
         <p:spPr>
           <a:xfrm>
-            <a:off x="8889797" y="2231136"/>
+            <a:off x="8259877" y="1197864"/>
             <a:ext cx="2780690" cy="329184"/>
           </a:xfrm>
           <a:prstGeom prst="rect">
@@ -1624,7 +1323,7 @@
           <a:bodyPr wrap="square" lIns="0" tIns="0" rIns="0" bIns="0" rtlCol="0" anchor="ctr"/>
           <a:lstStyle/>
           <a:p>
-            <a:pPr indent="0" marL="0">
+            <a:pPr marL="0" indent="0">
               <a:buNone/>
             </a:pPr>
             <a:r>
@@ -1650,7 +1349,7 @@
         </p:nvSpPr>
         <p:spPr>
           <a:xfrm>
-            <a:off x="8359445" y="2596896"/>
+            <a:off x="7729525" y="1563624"/>
             <a:ext cx="3283610" cy="402336"/>
           </a:xfrm>
           <a:prstGeom prst="rect">
@@ -1663,9 +1362,7 @@
           <a:bodyPr wrap="square" lIns="0" tIns="0" rIns="0" bIns="0" rtlCol="0" anchor="ctr"/>
           <a:lstStyle/>
           <a:p>
-            <a:pPr algn="ctr" indent="0" marL="0">
-              <a:buNone/>
-            </a:pPr>
+            <a:pPr algn="ctr"/>
             <a:r>
               <a:rPr lang="en-US" sz="2300" b="1" dirty="0">
                 <a:solidFill>
@@ -1675,8 +1372,25 @@
                 <a:ea typeface="Calibri" pitchFamily="34" charset="-122"/>
                 <a:cs typeface="Calibri" pitchFamily="34" charset="-120"/>
               </a:rPr>
-              <a:t>22.3 sec</a:t>
+              <a:t>22.3 sec </a:t>
             </a:r>
+            <a:r>
+              <a:rPr lang="en-US" sz="700" b="1" dirty="0">
+                <a:solidFill>
+                  <a:srgbClr val="EFE2F8"/>
+                </a:solidFill>
+                <a:latin typeface="Calibri" pitchFamily="34" charset="0"/>
+                <a:ea typeface="Calibri" pitchFamily="34" charset="-122"/>
+                <a:cs typeface="Calibri" pitchFamily="34" charset="-120"/>
+              </a:rPr>
+              <a:t>per table / month  ·  fastest</a:t>
+            </a:r>
+            <a:endParaRPr lang="en-US" sz="700" dirty="0"/>
+          </a:p>
+          <a:p>
+            <a:pPr marL="0" indent="0" algn="ctr">
+              <a:buNone/>
+            </a:pPr>
             <a:endParaRPr lang="en-US" sz="2300" dirty="0"/>
           </a:p>
         </p:txBody>
@@ -1689,7 +1403,7 @@
         </p:nvSpPr>
         <p:spPr>
           <a:xfrm>
-            <a:off x="8359445" y="2999232"/>
+            <a:off x="7967268" y="1929384"/>
             <a:ext cx="3283610" cy="182880"/>
           </a:xfrm>
           <a:prstGeom prst="rect">
@@ -1702,20 +1416,9 @@
           <a:bodyPr wrap="square" lIns="0" tIns="0" rIns="0" bIns="0" rtlCol="0" anchor="ctr"/>
           <a:lstStyle/>
           <a:p>
-            <a:pPr algn="ctr" indent="0" marL="0">
+            <a:pPr marL="0" indent="0" algn="ctr">
               <a:buNone/>
             </a:pPr>
-            <a:r>
-              <a:rPr lang="en-US" sz="900" b="1" dirty="0">
-                <a:solidFill>
-                  <a:srgbClr val="EFE2F8"/>
-                </a:solidFill>
-                <a:latin typeface="Calibri" pitchFamily="34" charset="0"/>
-                <a:ea typeface="Calibri" pitchFamily="34" charset="-122"/>
-                <a:cs typeface="Calibri" pitchFamily="34" charset="-120"/>
-              </a:rPr>
-              <a:t>per table / month  ·  fastest</a:t>
-            </a:r>
             <a:endParaRPr lang="en-US" sz="900" dirty="0"/>
           </a:p>
         </p:txBody>
@@ -1741,7 +1444,7 @@
           <a:bodyPr wrap="square" lIns="0" tIns="0" rIns="0" bIns="0" rtlCol="0" anchor="ctr"/>
           <a:lstStyle/>
           <a:p>
-            <a:pPr indent="0" marL="0">
+            <a:pPr marL="0" indent="0">
               <a:buNone/>
             </a:pPr>
             <a:r>
@@ -1785,6 +1488,13 @@
             <a:prstDash val="solid"/>
           </a:ln>
         </p:spPr>
+        <p:txBody>
+          <a:bodyPr/>
+          <a:lstStyle/>
+          <a:p>
+            <a:endParaRPr lang="en-IN"/>
+          </a:p>
+        </p:txBody>
       </p:sp>
       <p:sp>
         <p:nvSpPr>
@@ -1805,17 +1515,24 @@
           </a:solidFill>
           <a:ln/>
         </p:spPr>
+        <p:txBody>
+          <a:bodyPr/>
+          <a:lstStyle/>
+          <a:p>
+            <a:endParaRPr lang="en-IN"/>
+          </a:p>
+        </p:txBody>
       </p:sp>
       <p:pic>
         <p:nvPicPr>
-          <p:cNvPr id="28" name="Image 4" descr="/home/claude/icons/server_white.png">    </p:cNvPr>
+          <p:cNvPr id="28" name="Image 4" descr="/home/claude/icons/server_white.png"/>
           <p:cNvPicPr>
             <a:picLocks noChangeAspect="1"/>
           </p:cNvPicPr>
           <p:nvPr/>
         </p:nvPicPr>
         <p:blipFill>
-          <a:blip r:embed="rId5"/>
+          <a:blip r:embed="rId3"/>
           <a:stretch>
             <a:fillRect/>
           </a:stretch>
@@ -1851,7 +1568,7 @@
           <a:bodyPr wrap="square" lIns="0" tIns="0" rIns="0" bIns="0" rtlCol="0" anchor="ctr"/>
           <a:lstStyle/>
           <a:p>
-            <a:pPr indent="0" marL="0">
+            <a:pPr marL="0" indent="0">
               <a:buNone/>
             </a:pPr>
             <a:r>
@@ -1890,7 +1607,7 @@
           <a:bodyPr wrap="square" lIns="0" tIns="0" rIns="0" bIns="0" rtlCol="0" anchor="ctr"/>
           <a:lstStyle/>
           <a:p>
-            <a:pPr algn="ctr" indent="0" marL="0">
+            <a:pPr marL="0" indent="0" algn="ctr">
               <a:buNone/>
             </a:pPr>
             <a:r>
@@ -1929,7 +1646,7 @@
           <a:bodyPr wrap="square" lIns="0" tIns="0" rIns="0" bIns="0" rtlCol="0" anchor="ctr"/>
           <a:lstStyle/>
           <a:p>
-            <a:pPr algn="ctr" indent="0" marL="0">
+            <a:pPr marL="0" indent="0" algn="ctr">
               <a:buNone/>
             </a:pPr>
             <a:r>
@@ -1973,6 +1690,13 @@
             <a:prstDash val="solid"/>
           </a:ln>
         </p:spPr>
+        <p:txBody>
+          <a:bodyPr/>
+          <a:lstStyle/>
+          <a:p>
+            <a:endParaRPr lang="en-IN"/>
+          </a:p>
+        </p:txBody>
       </p:sp>
       <p:sp>
         <p:nvSpPr>
@@ -1993,17 +1717,24 @@
           </a:solidFill>
           <a:ln/>
         </p:spPr>
+        <p:txBody>
+          <a:bodyPr/>
+          <a:lstStyle/>
+          <a:p>
+            <a:endParaRPr lang="en-IN"/>
+          </a:p>
+        </p:txBody>
       </p:sp>
       <p:pic>
         <p:nvPicPr>
-          <p:cNvPr id="34" name="Image 5" descr="/home/claude/icons/cloud_white.png">    </p:cNvPr>
+          <p:cNvPr id="34" name="Image 5" descr="/home/claude/icons/cloud_white.png"/>
           <p:cNvPicPr>
             <a:picLocks noChangeAspect="1"/>
           </p:cNvPicPr>
           <p:nvPr/>
         </p:nvPicPr>
         <p:blipFill>
-          <a:blip r:embed="rId6"/>
+          <a:blip r:embed="rId4"/>
           <a:stretch>
             <a:fillRect/>
           </a:stretch>
@@ -2039,7 +1770,7 @@
           <a:bodyPr wrap="square" lIns="0" tIns="0" rIns="0" bIns="0" rtlCol="0" anchor="ctr"/>
           <a:lstStyle/>
           <a:p>
-            <a:pPr indent="0" marL="0">
+            <a:pPr marL="0" indent="0">
               <a:buNone/>
             </a:pPr>
             <a:r>
@@ -2078,7 +1809,7 @@
           <a:bodyPr wrap="square" lIns="0" tIns="0" rIns="0" bIns="0" rtlCol="0" anchor="ctr"/>
           <a:lstStyle/>
           <a:p>
-            <a:pPr algn="ctr" indent="0" marL="0">
+            <a:pPr marL="0" indent="0" algn="ctr">
               <a:buNone/>
             </a:pPr>
             <a:r>
@@ -2117,7 +1848,7 @@
           <a:bodyPr wrap="square" lIns="0" tIns="0" rIns="0" bIns="0" rtlCol="0" anchor="ctr"/>
           <a:lstStyle/>
           <a:p>
-            <a:pPr algn="ctr" indent="0" marL="0">
+            <a:pPr marL="0" indent="0" algn="ctr">
               <a:buNone/>
             </a:pPr>
             <a:r>
@@ -2156,6 +1887,13 @@
           </a:solidFill>
           <a:ln/>
         </p:spPr>
+        <p:txBody>
+          <a:bodyPr/>
+          <a:lstStyle/>
+          <a:p>
+            <a:endParaRPr lang="en-IN"/>
+          </a:p>
+        </p:txBody>
       </p:sp>
       <p:sp>
         <p:nvSpPr>
@@ -2176,17 +1914,24 @@
           </a:solidFill>
           <a:ln/>
         </p:spPr>
+        <p:txBody>
+          <a:bodyPr/>
+          <a:lstStyle/>
+          <a:p>
+            <a:endParaRPr lang="en-IN"/>
+          </a:p>
+        </p:txBody>
       </p:sp>
       <p:pic>
         <p:nvPicPr>
-          <p:cNvPr id="40" name="Image 6" descr="/home/claude/icons/zap_white.png">    </p:cNvPr>
+          <p:cNvPr id="40" name="Image 6" descr="/home/claude/icons/zap_white.png"/>
           <p:cNvPicPr>
             <a:picLocks noChangeAspect="1"/>
           </p:cNvPicPr>
           <p:nvPr/>
         </p:nvPicPr>
         <p:blipFill>
-          <a:blip r:embed="rId7"/>
+          <a:blip r:embed="rId5"/>
           <a:stretch>
             <a:fillRect/>
           </a:stretch>
@@ -2222,7 +1967,7 @@
           <a:bodyPr wrap="square" lIns="0" tIns="0" rIns="0" bIns="0" rtlCol="0" anchor="ctr"/>
           <a:lstStyle/>
           <a:p>
-            <a:pPr indent="0" marL="0">
+            <a:pPr marL="0" indent="0">
               <a:buNone/>
             </a:pPr>
             <a:r>
@@ -2261,7 +2006,7 @@
           <a:bodyPr wrap="square" lIns="0" tIns="0" rIns="0" bIns="0" rtlCol="0" anchor="ctr"/>
           <a:lstStyle/>
           <a:p>
-            <a:pPr algn="ctr" indent="0" marL="0">
+            <a:pPr marL="0" indent="0" algn="ctr">
               <a:buNone/>
             </a:pPr>
             <a:r>
@@ -2300,7 +2045,7 @@
           <a:bodyPr wrap="square" lIns="0" tIns="0" rIns="0" bIns="0" rtlCol="0" anchor="ctr"/>
           <a:lstStyle/>
           <a:p>
-            <a:pPr algn="ctr" indent="0" marL="0">
+            <a:pPr marL="0" indent="0" algn="ctr">
               <a:buNone/>
             </a:pPr>
             <a:r>
@@ -2326,7 +2071,7 @@
         </p:nvSpPr>
         <p:spPr>
           <a:xfrm>
-            <a:off x="365760" y="5010912"/>
+            <a:off x="413307" y="5607812"/>
             <a:ext cx="7315200" cy="237744"/>
           </a:xfrm>
           <a:prstGeom prst="rect">
@@ -2339,7 +2084,7 @@
           <a:bodyPr wrap="square" lIns="0" tIns="0" rIns="0" bIns="0" rtlCol="0" anchor="ctr"/>
           <a:lstStyle/>
           <a:p>
-            <a:pPr indent="0" marL="0">
+            <a:pPr marL="0" indent="0">
               <a:buNone/>
             </a:pPr>
             <a:r>
@@ -2359,20 +2104,20 @@
       </p:sp>
       <p:graphicFrame>
         <p:nvGraphicFramePr>
-          <p:cNvPr id="2" name="Table 0"/>
+          <p:cNvPr id="45" name="Table 0"/>
           <p:cNvGraphicFramePr>
             <a:graphicFrameLocks noGrp="1"/>
           </p:cNvGraphicFramePr>
           <p:nvPr>
             <p:extLst>
               <p:ext uri="{D42A27DB-BD31-4B8C-83A1-F6EECF244321}">
-                <p14:modId xmlns:p14="http://schemas.microsoft.com/office/powerpoint/2010/main" val="1579011935"/>
+                <p14:modId xmlns:p14="http://schemas.microsoft.com/office/powerpoint/2010/main" val="2570926871"/>
               </p:ext>
             </p:extLst>
           </p:nvPr>
         </p:nvGraphicFramePr>
         <p:xfrm>
-          <a:off x="365760" y="5303520"/>
+          <a:off x="350520" y="5779008"/>
           <a:ext cx="11460175" cy="850392"/>
         </p:xfrm>
         <a:graphic>
@@ -2380,11 +2125,41 @@
             <a:tbl>
               <a:tblPr/>
               <a:tblGrid>
-                <a:gridCol w="3230575"/>
-                <a:gridCol w="2057400"/>
-                <a:gridCol w="2057400"/>
-                <a:gridCol w="2057400"/>
-                <a:gridCol w="2057400"/>
+                <a:gridCol w="3230575">
+                  <a:extLst>
+                    <a:ext uri="{9D8B030D-6E8A-4147-A177-3AD203B41FA5}">
+                      <a16:colId xmlns:a16="http://schemas.microsoft.com/office/drawing/2014/main" val="20000"/>
+                    </a:ext>
+                  </a:extLst>
+                </a:gridCol>
+                <a:gridCol w="2057400">
+                  <a:extLst>
+                    <a:ext uri="{9D8B030D-6E8A-4147-A177-3AD203B41FA5}">
+                      <a16:colId xmlns:a16="http://schemas.microsoft.com/office/drawing/2014/main" val="20001"/>
+                    </a:ext>
+                  </a:extLst>
+                </a:gridCol>
+                <a:gridCol w="2057400">
+                  <a:extLst>
+                    <a:ext uri="{9D8B030D-6E8A-4147-A177-3AD203B41FA5}">
+                      <a16:colId xmlns:a16="http://schemas.microsoft.com/office/drawing/2014/main" val="20002"/>
+                    </a:ext>
+                  </a:extLst>
+                </a:gridCol>
+                <a:gridCol w="2057400">
+                  <a:extLst>
+                    <a:ext uri="{9D8B030D-6E8A-4147-A177-3AD203B41FA5}">
+                      <a16:colId xmlns:a16="http://schemas.microsoft.com/office/drawing/2014/main" val="20003"/>
+                    </a:ext>
+                  </a:extLst>
+                </a:gridCol>
+                <a:gridCol w="2057400">
+                  <a:extLst>
+                    <a:ext uri="{9D8B030D-6E8A-4147-A177-3AD203B41FA5}">
+                      <a16:colId xmlns:a16="http://schemas.microsoft.com/office/drawing/2014/main" val="20004"/>
+                    </a:ext>
+                  </a:extLst>
+                </a:gridCol>
               </a:tblGrid>
               <a:tr h="283464">
                 <a:tc>
@@ -2392,7 +2167,7 @@
                     <a:bodyPr/>
                     <a:lstStyle/>
                     <a:p>
-                      <a:pPr indent="0" marL="0">
+                      <a:pPr marL="0" indent="0">
                         <a:buNone/>
                       </a:pPr>
                       <a:r>
@@ -2413,7 +2188,7 @@
                       </a:endParaRPr>
                     </a:p>
                   </a:txBody>
-                  <a:tcPr marL="91440" marR="91440" marT="45720" marB="45720" anchor="ctr">
+                  <a:tcPr anchor="ctr">
                     <a:lnL w="12700" cap="flat" cmpd="sng" algn="ctr">
                       <a:solidFill>
                         <a:srgbClr val="E0D7EC"/>
@@ -2460,7 +2235,7 @@
                     <a:bodyPr/>
                     <a:lstStyle/>
                     <a:p>
-                      <a:pPr algn="ctr" indent="0" marL="0">
+                      <a:pPr marL="0" indent="0" algn="ctr">
                         <a:buNone/>
                       </a:pPr>
                       <a:r>
@@ -2481,7 +2256,7 @@
                       </a:endParaRPr>
                     </a:p>
                   </a:txBody>
-                  <a:tcPr marL="91440" marR="91440" marT="45720" marB="45720" anchor="ctr">
+                  <a:tcPr anchor="ctr">
                     <a:lnL w="12700" cap="flat" cmpd="sng" algn="ctr">
                       <a:solidFill>
                         <a:srgbClr val="E0D7EC"/>
@@ -2528,7 +2303,7 @@
                     <a:bodyPr/>
                     <a:lstStyle/>
                     <a:p>
-                      <a:pPr algn="ctr" indent="0" marL="0">
+                      <a:pPr marL="0" indent="0" algn="ctr">
                         <a:buNone/>
                       </a:pPr>
                       <a:r>
@@ -2549,7 +2324,7 @@
                       </a:endParaRPr>
                     </a:p>
                   </a:txBody>
-                  <a:tcPr marL="91440" marR="91440" marT="45720" marB="45720" anchor="ctr">
+                  <a:tcPr anchor="ctr">
                     <a:lnL w="12700" cap="flat" cmpd="sng" algn="ctr">
                       <a:solidFill>
                         <a:srgbClr val="E0D7EC"/>
@@ -2596,7 +2371,7 @@
                     <a:bodyPr/>
                     <a:lstStyle/>
                     <a:p>
-                      <a:pPr algn="ctr" indent="0" marL="0">
+                      <a:pPr marL="0" indent="0" algn="ctr">
                         <a:buNone/>
                       </a:pPr>
                       <a:r>
@@ -2617,7 +2392,7 @@
                       </a:endParaRPr>
                     </a:p>
                   </a:txBody>
-                  <a:tcPr marL="91440" marR="91440" marT="45720" marB="45720" anchor="ctr">
+                  <a:tcPr anchor="ctr">
                     <a:lnL w="12700" cap="flat" cmpd="sng" algn="ctr">
                       <a:solidFill>
                         <a:srgbClr val="E0D7EC"/>
@@ -2664,7 +2439,7 @@
                     <a:bodyPr/>
                     <a:lstStyle/>
                     <a:p>
-                      <a:pPr algn="ctr" indent="0" marL="0">
+                      <a:pPr marL="0" indent="0" algn="ctr">
                         <a:buNone/>
                       </a:pPr>
                       <a:r>
@@ -2685,7 +2460,7 @@
                       </a:endParaRPr>
                     </a:p>
                   </a:txBody>
-                  <a:tcPr marL="91440" marR="91440" marT="45720" marB="45720" anchor="ctr">
+                  <a:tcPr anchor="ctr">
                     <a:lnL w="12700" cap="flat" cmpd="sng" algn="ctr">
                       <a:solidFill>
                         <a:srgbClr val="E0D7EC"/>
@@ -2727,6 +2502,11 @@
                     </a:solidFill>
                   </a:tcPr>
                 </a:tc>
+                <a:extLst>
+                  <a:ext uri="{0D108BD9-81ED-4DB2-BD59-A6C34878D82A}">
+                    <a16:rowId xmlns:a16="http://schemas.microsoft.com/office/drawing/2014/main" val="10000"/>
+                  </a:ext>
+                </a:extLst>
               </a:tr>
               <a:tr h="283464">
                 <a:tc>
@@ -2734,7 +2514,7 @@
                     <a:bodyPr/>
                     <a:lstStyle/>
                     <a:p>
-                      <a:pPr indent="0" marL="0">
+                      <a:pPr marL="0" indent="0">
                         <a:buNone/>
                       </a:pPr>
                       <a:r>
@@ -2755,7 +2535,7 @@
                       </a:endParaRPr>
                     </a:p>
                   </a:txBody>
-                  <a:tcPr marL="91440" marR="91440" marT="45720" marB="45720" anchor="ctr">
+                  <a:tcPr anchor="ctr">
                     <a:lnL w="12700" cap="flat" cmpd="sng" algn="ctr">
                       <a:solidFill>
                         <a:srgbClr val="E0D7EC"/>
@@ -2802,7 +2582,7 @@
                     <a:bodyPr/>
                     <a:lstStyle/>
                     <a:p>
-                      <a:pPr algn="ctr" indent="0" marL="0">
+                      <a:pPr marL="0" indent="0" algn="ctr">
                         <a:buNone/>
                       </a:pPr>
                       <a:r>
@@ -2823,7 +2603,7 @@
                       </a:endParaRPr>
                     </a:p>
                   </a:txBody>
-                  <a:tcPr marL="91440" marR="91440" marT="45720" marB="45720" anchor="ctr">
+                  <a:tcPr anchor="ctr">
                     <a:lnL w="12700" cap="flat" cmpd="sng" algn="ctr">
                       <a:solidFill>
                         <a:srgbClr val="E0D7EC"/>
@@ -2870,7 +2650,7 @@
                     <a:bodyPr/>
                     <a:lstStyle/>
                     <a:p>
-                      <a:pPr algn="ctr" indent="0" marL="0">
+                      <a:pPr marL="0" indent="0" algn="ctr">
                         <a:buNone/>
                       </a:pPr>
                       <a:r>
@@ -2891,7 +2671,7 @@
                       </a:endParaRPr>
                     </a:p>
                   </a:txBody>
-                  <a:tcPr marL="91440" marR="91440" marT="45720" marB="45720" anchor="ctr">
+                  <a:tcPr anchor="ctr">
                     <a:lnL w="12700" cap="flat" cmpd="sng" algn="ctr">
                       <a:solidFill>
                         <a:srgbClr val="E0D7EC"/>
@@ -2938,7 +2718,7 @@
                     <a:bodyPr/>
                     <a:lstStyle/>
                     <a:p>
-                      <a:pPr algn="ctr" indent="0" marL="0">
+                      <a:pPr marL="0" indent="0" algn="ctr">
                         <a:buNone/>
                       </a:pPr>
                       <a:r>
@@ -2959,7 +2739,7 @@
                       </a:endParaRPr>
                     </a:p>
                   </a:txBody>
-                  <a:tcPr marL="91440" marR="91440" marT="45720" marB="45720" anchor="ctr">
+                  <a:tcPr anchor="ctr">
                     <a:lnL w="12700" cap="flat" cmpd="sng" algn="ctr">
                       <a:solidFill>
                         <a:srgbClr val="E0D7EC"/>
@@ -3006,7 +2786,7 @@
                     <a:bodyPr/>
                     <a:lstStyle/>
                     <a:p>
-                      <a:pPr algn="ctr" indent="0" marL="0">
+                      <a:pPr marL="0" indent="0" algn="ctr">
                         <a:buNone/>
                       </a:pPr>
                       <a:r>
@@ -3027,7 +2807,7 @@
                       </a:endParaRPr>
                     </a:p>
                   </a:txBody>
-                  <a:tcPr marL="91440" marR="91440" marT="45720" marB="45720" anchor="ctr">
+                  <a:tcPr anchor="ctr">
                     <a:lnL w="12700" cap="flat" cmpd="sng" algn="ctr">
                       <a:solidFill>
                         <a:srgbClr val="E0D7EC"/>
@@ -3069,6 +2849,11 @@
                     </a:solidFill>
                   </a:tcPr>
                 </a:tc>
+                <a:extLst>
+                  <a:ext uri="{0D108BD9-81ED-4DB2-BD59-A6C34878D82A}">
+                    <a16:rowId xmlns:a16="http://schemas.microsoft.com/office/drawing/2014/main" val="10001"/>
+                  </a:ext>
+                </a:extLst>
               </a:tr>
               <a:tr h="283464">
                 <a:tc>
@@ -3076,7 +2861,7 @@
                     <a:bodyPr/>
                     <a:lstStyle/>
                     <a:p>
-                      <a:pPr indent="0" marL="0">
+                      <a:pPr marL="0" indent="0">
                         <a:buNone/>
                       </a:pPr>
                       <a:r>
@@ -3097,7 +2882,7 @@
                       </a:endParaRPr>
                     </a:p>
                   </a:txBody>
-                  <a:tcPr marL="91440" marR="91440" marT="45720" marB="45720" anchor="ctr">
+                  <a:tcPr anchor="ctr">
                     <a:lnL w="12700" cap="flat" cmpd="sng" algn="ctr">
                       <a:solidFill>
                         <a:srgbClr val="E0D7EC"/>
@@ -3144,7 +2929,7 @@
                     <a:bodyPr/>
                     <a:lstStyle/>
                     <a:p>
-                      <a:pPr algn="ctr" indent="0" marL="0">
+                      <a:pPr marL="0" indent="0" algn="ctr">
                         <a:buNone/>
                       </a:pPr>
                       <a:r>
@@ -3165,7 +2950,7 @@
                       </a:endParaRPr>
                     </a:p>
                   </a:txBody>
-                  <a:tcPr marL="91440" marR="91440" marT="45720" marB="45720" anchor="ctr">
+                  <a:tcPr anchor="ctr">
                     <a:lnL w="12700" cap="flat" cmpd="sng" algn="ctr">
                       <a:solidFill>
                         <a:srgbClr val="E0D7EC"/>
@@ -3212,7 +2997,7 @@
                     <a:bodyPr/>
                     <a:lstStyle/>
                     <a:p>
-                      <a:pPr algn="ctr" indent="0" marL="0">
+                      <a:pPr marL="0" indent="0" algn="ctr">
                         <a:buNone/>
                       </a:pPr>
                       <a:r>
@@ -3233,7 +3018,7 @@
                       </a:endParaRPr>
                     </a:p>
                   </a:txBody>
-                  <a:tcPr marL="91440" marR="91440" marT="45720" marB="45720" anchor="ctr">
+                  <a:tcPr anchor="ctr">
                     <a:lnL w="12700" cap="flat" cmpd="sng" algn="ctr">
                       <a:solidFill>
                         <a:srgbClr val="E0D7EC"/>
@@ -3280,7 +3065,7 @@
                     <a:bodyPr/>
                     <a:lstStyle/>
                     <a:p>
-                      <a:pPr algn="ctr" indent="0" marL="0">
+                      <a:pPr marL="0" indent="0" algn="ctr">
                         <a:buNone/>
                       </a:pPr>
                       <a:r>
@@ -3301,7 +3086,7 @@
                       </a:endParaRPr>
                     </a:p>
                   </a:txBody>
-                  <a:tcPr marL="91440" marR="91440" marT="45720" marB="45720" anchor="ctr">
+                  <a:tcPr anchor="ctr">
                     <a:lnL w="12700" cap="flat" cmpd="sng" algn="ctr">
                       <a:solidFill>
                         <a:srgbClr val="E0D7EC"/>
@@ -3348,7 +3133,7 @@
                     <a:bodyPr/>
                     <a:lstStyle/>
                     <a:p>
-                      <a:pPr algn="ctr" indent="0" marL="0">
+                      <a:pPr marL="0" indent="0" algn="ctr">
                         <a:buNone/>
                       </a:pPr>
                       <a:r>
@@ -3369,7 +3154,7 @@
                       </a:endParaRPr>
                     </a:p>
                   </a:txBody>
-                  <a:tcPr marL="91440" marR="91440" marT="45720" marB="45720" anchor="ctr">
+                  <a:tcPr anchor="ctr">
                     <a:lnL w="12700" cap="flat" cmpd="sng" algn="ctr">
                       <a:solidFill>
                         <a:srgbClr val="E0D7EC"/>
@@ -3411,6 +3196,11 @@
                     </a:solidFill>
                   </a:tcPr>
                 </a:tc>
+                <a:extLst>
+                  <a:ext uri="{0D108BD9-81ED-4DB2-BD59-A6C34878D82A}">
+                    <a16:rowId xmlns:a16="http://schemas.microsoft.com/office/drawing/2014/main" val="10002"/>
+                  </a:ext>
+                </a:extLst>
               </a:tr>
             </a:tbl>
           </a:graphicData>
@@ -3437,7 +3227,7 @@
           <a:bodyPr wrap="square" lIns="0" tIns="0" rIns="0" bIns="0" rtlCol="0" anchor="ctr"/>
           <a:lstStyle/>
           <a:p>
-            <a:pPr indent="0" marL="0">
+            <a:pPr marL="0" indent="0">
               <a:buNone/>
             </a:pPr>
             <a:r>
@@ -3476,7 +3266,7 @@
           <a:bodyPr wrap="square" lIns="0" tIns="0" rIns="0" bIns="0" rtlCol="0" anchor="ctr"/>
           <a:lstStyle/>
           <a:p>
-            <a:pPr algn="r" indent="0" marL="0">
+            <a:pPr marL="0" indent="0" algn="r">
               <a:buNone/>
             </a:pPr>
             <a:r>
@@ -3515,7 +3305,7 @@
           <a:bodyPr wrap="square" lIns="0" tIns="0" rIns="0" bIns="0" rtlCol="0" anchor="ctr"/>
           <a:lstStyle/>
           <a:p>
-            <a:pPr algn="r" indent="0" marL="0">
+            <a:pPr marL="0" indent="0" algn="r">
               <a:buNone/>
             </a:pPr>
             <a:r>
@@ -3533,6 +3323,684 @@
           </a:p>
         </p:txBody>
       </p:sp>
+      <p:graphicFrame>
+        <p:nvGraphicFramePr>
+          <p:cNvPr id="53" name="Table 52">
+            <a:extLst>
+              <a:ext uri="{FF2B5EF4-FFF2-40B4-BE49-F238E27FC236}">
+                <a16:creationId xmlns:a16="http://schemas.microsoft.com/office/drawing/2014/main" id="{F153EBAF-ACEF-1661-2362-B53BFDFC2AE9}"/>
+              </a:ext>
+            </a:extLst>
+          </p:cNvPr>
+          <p:cNvGraphicFramePr>
+            <a:graphicFrameLocks noGrp="1"/>
+          </p:cNvGraphicFramePr>
+          <p:nvPr>
+            <p:extLst>
+              <p:ext uri="{D42A27DB-BD31-4B8C-83A1-F6EECF244321}">
+                <p14:modId xmlns:p14="http://schemas.microsoft.com/office/powerpoint/2010/main" val="2980734582"/>
+              </p:ext>
+            </p:extLst>
+          </p:nvPr>
+        </p:nvGraphicFramePr>
+        <p:xfrm>
+          <a:off x="3255263" y="1909470"/>
+          <a:ext cx="3791560" cy="1698377"/>
+        </p:xfrm>
+        <a:graphic>
+          <a:graphicData uri="http://schemas.openxmlformats.org/drawingml/2006/table">
+            <a:tbl>
+              <a:tblPr firstRow="1" bandRow="1">
+                <a:tableStyleId>{5C22544A-7EE6-4342-B048-85BDC9FD1C3A}</a:tableStyleId>
+              </a:tblPr>
+              <a:tblGrid>
+                <a:gridCol w="947890">
+                  <a:extLst>
+                    <a:ext uri="{9D8B030D-6E8A-4147-A177-3AD203B41FA5}">
+                      <a16:colId xmlns:a16="http://schemas.microsoft.com/office/drawing/2014/main" val="1577762914"/>
+                    </a:ext>
+                  </a:extLst>
+                </a:gridCol>
+                <a:gridCol w="947890">
+                  <a:extLst>
+                    <a:ext uri="{9D8B030D-6E8A-4147-A177-3AD203B41FA5}">
+                      <a16:colId xmlns:a16="http://schemas.microsoft.com/office/drawing/2014/main" val="216908285"/>
+                    </a:ext>
+                  </a:extLst>
+                </a:gridCol>
+                <a:gridCol w="947890">
+                  <a:extLst>
+                    <a:ext uri="{9D8B030D-6E8A-4147-A177-3AD203B41FA5}">
+                      <a16:colId xmlns:a16="http://schemas.microsoft.com/office/drawing/2014/main" val="3587796527"/>
+                    </a:ext>
+                  </a:extLst>
+                </a:gridCol>
+                <a:gridCol w="947890">
+                  <a:extLst>
+                    <a:ext uri="{9D8B030D-6E8A-4147-A177-3AD203B41FA5}">
+                      <a16:colId xmlns:a16="http://schemas.microsoft.com/office/drawing/2014/main" val="878139356"/>
+                    </a:ext>
+                  </a:extLst>
+                </a:gridCol>
+              </a:tblGrid>
+              <a:tr h="281057">
+                <a:tc>
+                  <a:txBody>
+                    <a:bodyPr/>
+                    <a:lstStyle/>
+                    <a:p>
+                      <a:pPr marL="0" indent="0">
+                        <a:buNone/>
+                      </a:pPr>
+                      <a:r>
+                        <a:rPr lang="en-US" sz="950" b="1" dirty="0">
+                          <a:solidFill>
+                            <a:srgbClr val="FFFFFF"/>
+                          </a:solidFill>
+                          <a:latin typeface="Calibri" pitchFamily="34" charset="0"/>
+                          <a:ea typeface="Calibri" pitchFamily="34" charset="-122"/>
+                          <a:cs typeface="Calibri" pitchFamily="34" charset="-120"/>
+                        </a:rPr>
+                        <a:t>Table</a:t>
+                      </a:r>
+                      <a:endParaRPr lang="en-US" sz="950" dirty="0">
+                        <a:latin typeface="Calibri" charset="0"/>
+                        <a:ea typeface="Calibri" charset="0"/>
+                        <a:cs typeface="Calibri" charset="0"/>
+                      </a:endParaRPr>
+                    </a:p>
+                  </a:txBody>
+                  <a:tcPr anchor="ctr"/>
+                </a:tc>
+                <a:tc>
+                  <a:txBody>
+                    <a:bodyPr/>
+                    <a:lstStyle/>
+                    <a:p>
+                      <a:pPr marL="0" indent="0" algn="ctr">
+                        <a:buNone/>
+                      </a:pPr>
+                      <a:r>
+                        <a:rPr lang="en-US" sz="950" b="1" dirty="0">
+                          <a:solidFill>
+                            <a:srgbClr val="FFFFFF"/>
+                          </a:solidFill>
+                          <a:latin typeface="Calibri" pitchFamily="34" charset="0"/>
+                          <a:ea typeface="Calibri" pitchFamily="34" charset="-122"/>
+                          <a:cs typeface="Calibri" pitchFamily="34" charset="-120"/>
+                        </a:rPr>
+                        <a:t>Load Range</a:t>
+                      </a:r>
+                      <a:endParaRPr lang="en-US" sz="950" dirty="0">
+                        <a:latin typeface="Calibri" charset="0"/>
+                        <a:ea typeface="Calibri" charset="0"/>
+                        <a:cs typeface="Calibri" charset="0"/>
+                      </a:endParaRPr>
+                    </a:p>
+                  </a:txBody>
+                  <a:tcPr anchor="ctr"/>
+                </a:tc>
+                <a:tc>
+                  <a:txBody>
+                    <a:bodyPr/>
+                    <a:lstStyle/>
+                    <a:p>
+                      <a:pPr marL="0" indent="0" algn="ctr">
+                        <a:buNone/>
+                      </a:pPr>
+                      <a:r>
+                        <a:rPr lang="en-US" sz="950" b="1" dirty="0">
+                          <a:solidFill>
+                            <a:srgbClr val="FFFFFF"/>
+                          </a:solidFill>
+                          <a:latin typeface="Calibri" pitchFamily="34" charset="0"/>
+                          <a:ea typeface="Calibri" pitchFamily="34" charset="-122"/>
+                          <a:cs typeface="Calibri" pitchFamily="34" charset="-120"/>
+                        </a:rPr>
+                        <a:t>Months</a:t>
+                      </a:r>
+                      <a:endParaRPr lang="en-US" sz="950" dirty="0">
+                        <a:latin typeface="Calibri" charset="0"/>
+                        <a:ea typeface="Calibri" charset="0"/>
+                        <a:cs typeface="Calibri" charset="0"/>
+                      </a:endParaRPr>
+                    </a:p>
+                  </a:txBody>
+                  <a:tcPr anchor="ctr"/>
+                </a:tc>
+                <a:tc>
+                  <a:txBody>
+                    <a:bodyPr/>
+                    <a:lstStyle/>
+                    <a:p>
+                      <a:pPr marL="0" indent="0" algn="ctr">
+                        <a:buNone/>
+                      </a:pPr>
+                      <a:r>
+                        <a:rPr lang="en-US" sz="950" b="1" dirty="0">
+                          <a:solidFill>
+                            <a:srgbClr val="FFFFFF"/>
+                          </a:solidFill>
+                          <a:latin typeface="Calibri" pitchFamily="34" charset="0"/>
+                          <a:ea typeface="Calibri" pitchFamily="34" charset="-122"/>
+                          <a:cs typeface="Calibri" pitchFamily="34" charset="-120"/>
+                        </a:rPr>
+                        <a:t> Time</a:t>
+                      </a:r>
+                      <a:endParaRPr lang="en-US" sz="950" dirty="0">
+                        <a:latin typeface="Calibri" charset="0"/>
+                        <a:ea typeface="Calibri" charset="0"/>
+                        <a:cs typeface="Calibri" charset="0"/>
+                      </a:endParaRPr>
+                    </a:p>
+                  </a:txBody>
+                  <a:tcPr anchor="ctr"/>
+                </a:tc>
+                <a:extLst>
+                  <a:ext uri="{0D108BD9-81ED-4DB2-BD59-A6C34878D82A}">
+                    <a16:rowId xmlns:a16="http://schemas.microsoft.com/office/drawing/2014/main" val="927931311"/>
+                  </a:ext>
+                </a:extLst>
+              </a:tr>
+              <a:tr h="281057">
+                <a:tc>
+                  <a:txBody>
+                    <a:bodyPr/>
+                    <a:lstStyle/>
+                    <a:p>
+                      <a:pPr algn="l" fontAlgn="ctr">
+                        <a:buNone/>
+                      </a:pPr>
+                      <a:r>
+                        <a:rPr lang="en-IN" sz="900" b="0" i="0" u="none" strike="noStrike" dirty="0" err="1">
+                          <a:solidFill>
+                            <a:srgbClr val="000000"/>
+                          </a:solidFill>
+                          <a:effectLst/>
+                          <a:latin typeface="Arial Unicode MS"/>
+                        </a:rPr>
+                        <a:t>fxg_fac_enti_bill_mth_hist</a:t>
+                      </a:r>
+                      <a:endParaRPr lang="en-IN" sz="900" b="0" i="0" u="none" strike="noStrike" dirty="0">
+                        <a:solidFill>
+                          <a:srgbClr val="000000"/>
+                        </a:solidFill>
+                        <a:effectLst/>
+                        <a:latin typeface="Arial Unicode MS"/>
+                      </a:endParaRPr>
+                    </a:p>
+                  </a:txBody>
+                  <a:tcPr marL="95250" marR="6350" marT="6350" marB="0" anchor="ctr"/>
+                </a:tc>
+                <a:tc>
+                  <a:txBody>
+                    <a:bodyPr/>
+                    <a:lstStyle/>
+                    <a:p>
+                      <a:pPr marL="0" indent="0" algn="ctr">
+                        <a:buNone/>
+                      </a:pPr>
+                      <a:r>
+                        <a:rPr lang="en-US" sz="950" dirty="0">
+                          <a:solidFill>
+                            <a:srgbClr val="4A4A4A"/>
+                          </a:solidFill>
+                          <a:latin typeface="Calibri" pitchFamily="34" charset="0"/>
+                          <a:ea typeface="Calibri" pitchFamily="34" charset="-122"/>
+                          <a:cs typeface="Calibri" pitchFamily="34" charset="-120"/>
+                        </a:rPr>
+                        <a:t>201701–202604</a:t>
+                      </a:r>
+                      <a:endParaRPr lang="en-US" sz="950" dirty="0">
+                        <a:latin typeface="Calibri" charset="0"/>
+                        <a:ea typeface="Calibri" charset="0"/>
+                        <a:cs typeface="Calibri" charset="0"/>
+                      </a:endParaRPr>
+                    </a:p>
+                  </a:txBody>
+                  <a:tcPr anchor="ctr"/>
+                </a:tc>
+                <a:tc>
+                  <a:txBody>
+                    <a:bodyPr/>
+                    <a:lstStyle/>
+                    <a:p>
+                      <a:pPr marL="0" indent="0" algn="ctr">
+                        <a:buNone/>
+                      </a:pPr>
+                      <a:r>
+                        <a:rPr lang="en-US" sz="950" dirty="0">
+                          <a:solidFill>
+                            <a:srgbClr val="4A4A4A"/>
+                          </a:solidFill>
+                          <a:latin typeface="Calibri" pitchFamily="34" charset="0"/>
+                          <a:ea typeface="Calibri" pitchFamily="34" charset="-122"/>
+                          <a:cs typeface="Calibri" pitchFamily="34" charset="-120"/>
+                        </a:rPr>
+                        <a:t>112</a:t>
+                      </a:r>
+                      <a:endParaRPr lang="en-US" sz="950" dirty="0">
+                        <a:latin typeface="Calibri" charset="0"/>
+                        <a:ea typeface="Calibri" charset="0"/>
+                        <a:cs typeface="Calibri" charset="0"/>
+                      </a:endParaRPr>
+                    </a:p>
+                  </a:txBody>
+                  <a:tcPr anchor="ctr"/>
+                </a:tc>
+                <a:tc>
+                  <a:txBody>
+                    <a:bodyPr/>
+                    <a:lstStyle/>
+                    <a:p>
+                      <a:pPr marL="0" indent="0" algn="ctr">
+                        <a:buNone/>
+                      </a:pPr>
+                      <a:r>
+                        <a:rPr lang="en-US" sz="950" dirty="0">
+                          <a:solidFill>
+                            <a:srgbClr val="4A4A4A"/>
+                          </a:solidFill>
+                          <a:latin typeface="Calibri" pitchFamily="34" charset="0"/>
+                          <a:ea typeface="Calibri" pitchFamily="34" charset="-122"/>
+                          <a:cs typeface="Calibri" pitchFamily="34" charset="-120"/>
+                        </a:rPr>
+                        <a:t>1d 1h 30m</a:t>
+                      </a:r>
+                      <a:endParaRPr lang="en-US" sz="950" dirty="0">
+                        <a:latin typeface="Calibri" charset="0"/>
+                        <a:ea typeface="Calibri" charset="0"/>
+                        <a:cs typeface="Calibri" charset="0"/>
+                      </a:endParaRPr>
+                    </a:p>
+                  </a:txBody>
+                  <a:tcPr anchor="ctr"/>
+                </a:tc>
+                <a:extLst>
+                  <a:ext uri="{0D108BD9-81ED-4DB2-BD59-A6C34878D82A}">
+                    <a16:rowId xmlns:a16="http://schemas.microsoft.com/office/drawing/2014/main" val="1980138204"/>
+                  </a:ext>
+                </a:extLst>
+              </a:tr>
+              <a:tr h="281057">
+                <a:tc>
+                  <a:txBody>
+                    <a:bodyPr/>
+                    <a:lstStyle/>
+                    <a:p>
+                      <a:pPr algn="l" fontAlgn="ctr">
+                        <a:buNone/>
+                      </a:pPr>
+                      <a:r>
+                        <a:rPr lang="en-IN" sz="1000" b="0" i="0" u="none" strike="noStrike" dirty="0" err="1">
+                          <a:solidFill>
+                            <a:srgbClr val="000000"/>
+                          </a:solidFill>
+                          <a:effectLst/>
+                          <a:latin typeface="Arial Unicode MS"/>
+                        </a:rPr>
+                        <a:t>fxg_ctry_enti_bill_mth_hist</a:t>
+                      </a:r>
+                      <a:endParaRPr lang="en-IN" sz="1000" b="0" i="0" u="none" strike="noStrike" dirty="0">
+                        <a:solidFill>
+                          <a:srgbClr val="000000"/>
+                        </a:solidFill>
+                        <a:effectLst/>
+                        <a:latin typeface="Arial Unicode MS"/>
+                      </a:endParaRPr>
+                    </a:p>
+                  </a:txBody>
+                  <a:tcPr marL="95250" marR="6350" marT="6350" marB="0" anchor="ctr"/>
+                </a:tc>
+                <a:tc>
+                  <a:txBody>
+                    <a:bodyPr/>
+                    <a:lstStyle/>
+                    <a:p>
+                      <a:pPr marL="0" indent="0" algn="ctr">
+                        <a:buNone/>
+                      </a:pPr>
+                      <a:r>
+                        <a:rPr lang="en-US" sz="950" dirty="0">
+                          <a:solidFill>
+                            <a:srgbClr val="4A4A4A"/>
+                          </a:solidFill>
+                          <a:latin typeface="Calibri" pitchFamily="34" charset="0"/>
+                          <a:ea typeface="Calibri" pitchFamily="34" charset="-122"/>
+                          <a:cs typeface="Calibri" pitchFamily="34" charset="-120"/>
+                        </a:rPr>
+                        <a:t>201901–202604</a:t>
+                      </a:r>
+                      <a:endParaRPr lang="en-US" sz="950" dirty="0">
+                        <a:latin typeface="Calibri" charset="0"/>
+                        <a:ea typeface="Calibri" charset="0"/>
+                        <a:cs typeface="Calibri" charset="0"/>
+                      </a:endParaRPr>
+                    </a:p>
+                  </a:txBody>
+                  <a:tcPr anchor="ctr"/>
+                </a:tc>
+                <a:tc>
+                  <a:txBody>
+                    <a:bodyPr/>
+                    <a:lstStyle/>
+                    <a:p>
+                      <a:pPr marL="0" indent="0" algn="ctr">
+                        <a:buNone/>
+                      </a:pPr>
+                      <a:r>
+                        <a:rPr lang="en-US" sz="950" dirty="0">
+                          <a:solidFill>
+                            <a:srgbClr val="4A4A4A"/>
+                          </a:solidFill>
+                          <a:latin typeface="Calibri" pitchFamily="34" charset="0"/>
+                          <a:ea typeface="Calibri" pitchFamily="34" charset="-122"/>
+                          <a:cs typeface="Calibri" pitchFamily="34" charset="-120"/>
+                        </a:rPr>
+                        <a:t>88</a:t>
+                      </a:r>
+                      <a:endParaRPr lang="en-US" sz="950" dirty="0">
+                        <a:latin typeface="Calibri" charset="0"/>
+                        <a:ea typeface="Calibri" charset="0"/>
+                        <a:cs typeface="Calibri" charset="0"/>
+                      </a:endParaRPr>
+                    </a:p>
+                  </a:txBody>
+                  <a:tcPr anchor="ctr"/>
+                </a:tc>
+                <a:tc>
+                  <a:txBody>
+                    <a:bodyPr/>
+                    <a:lstStyle/>
+                    <a:p>
+                      <a:pPr marL="0" indent="0" algn="ctr">
+                        <a:buNone/>
+                      </a:pPr>
+                      <a:r>
+                        <a:rPr lang="en-US" sz="950" dirty="0">
+                          <a:solidFill>
+                            <a:srgbClr val="4A4A4A"/>
+                          </a:solidFill>
+                          <a:latin typeface="Calibri" pitchFamily="34" charset="0"/>
+                          <a:ea typeface="Calibri" pitchFamily="34" charset="-122"/>
+                          <a:cs typeface="Calibri" pitchFamily="34" charset="-120"/>
+                        </a:rPr>
+                        <a:t>1d 8h</a:t>
+                      </a:r>
+                      <a:endParaRPr lang="en-US" sz="950" dirty="0">
+                        <a:latin typeface="Calibri" charset="0"/>
+                        <a:ea typeface="Calibri" charset="0"/>
+                        <a:cs typeface="Calibri" charset="0"/>
+                      </a:endParaRPr>
+                    </a:p>
+                  </a:txBody>
+                  <a:tcPr anchor="ctr"/>
+                </a:tc>
+                <a:extLst>
+                  <a:ext uri="{0D108BD9-81ED-4DB2-BD59-A6C34878D82A}">
+                    <a16:rowId xmlns:a16="http://schemas.microsoft.com/office/drawing/2014/main" val="2464681270"/>
+                  </a:ext>
+                </a:extLst>
+              </a:tr>
+              <a:tr h="281057">
+                <a:tc>
+                  <a:txBody>
+                    <a:bodyPr/>
+                    <a:lstStyle/>
+                    <a:p>
+                      <a:pPr algn="l" fontAlgn="ctr">
+                        <a:buNone/>
+                      </a:pPr>
+                      <a:r>
+                        <a:rPr lang="en-IN" sz="1000" b="0" i="0" u="none" strike="noStrike" dirty="0" err="1">
+                          <a:solidFill>
+                            <a:srgbClr val="000000"/>
+                          </a:solidFill>
+                          <a:effectLst/>
+                          <a:latin typeface="Arial Unicode MS"/>
+                        </a:rPr>
+                        <a:t>fxg_glbl_enti_bill_mth_hist</a:t>
+                      </a:r>
+                      <a:endParaRPr lang="en-IN" sz="1000" b="0" i="0" u="none" strike="noStrike" dirty="0">
+                        <a:solidFill>
+                          <a:srgbClr val="000000"/>
+                        </a:solidFill>
+                        <a:effectLst/>
+                        <a:latin typeface="Arial Unicode MS"/>
+                      </a:endParaRPr>
+                    </a:p>
+                  </a:txBody>
+                  <a:tcPr marL="95250" marR="6350" marT="6350" marB="0" anchor="ctr"/>
+                </a:tc>
+                <a:tc>
+                  <a:txBody>
+                    <a:bodyPr/>
+                    <a:lstStyle/>
+                    <a:p>
+                      <a:pPr marL="0" indent="0" algn="ctr">
+                        <a:buNone/>
+                      </a:pPr>
+                      <a:r>
+                        <a:rPr lang="en-US" sz="950" dirty="0">
+                          <a:solidFill>
+                            <a:srgbClr val="4A4A4A"/>
+                          </a:solidFill>
+                          <a:latin typeface="Calibri" pitchFamily="34" charset="0"/>
+                          <a:ea typeface="Calibri" pitchFamily="34" charset="-122"/>
+                          <a:cs typeface="Calibri" pitchFamily="34" charset="-120"/>
+                        </a:rPr>
+                        <a:t>202212–202604</a:t>
+                      </a:r>
+                      <a:endParaRPr lang="en-US" sz="950" dirty="0">
+                        <a:latin typeface="Calibri" charset="0"/>
+                        <a:ea typeface="Calibri" charset="0"/>
+                        <a:cs typeface="Calibri" charset="0"/>
+                      </a:endParaRPr>
+                    </a:p>
+                  </a:txBody>
+                  <a:tcPr anchor="ctr"/>
+                </a:tc>
+                <a:tc>
+                  <a:txBody>
+                    <a:bodyPr/>
+                    <a:lstStyle/>
+                    <a:p>
+                      <a:pPr marL="0" indent="0" algn="ctr">
+                        <a:buNone/>
+                      </a:pPr>
+                      <a:r>
+                        <a:rPr lang="en-US" sz="950" dirty="0">
+                          <a:solidFill>
+                            <a:srgbClr val="4A4A4A"/>
+                          </a:solidFill>
+                          <a:latin typeface="Calibri" pitchFamily="34" charset="0"/>
+                          <a:ea typeface="Calibri" pitchFamily="34" charset="-122"/>
+                          <a:cs typeface="Calibri" pitchFamily="34" charset="-120"/>
+                        </a:rPr>
+                        <a:t>41</a:t>
+                      </a:r>
+                      <a:endParaRPr lang="en-US" sz="950" dirty="0">
+                        <a:latin typeface="Calibri" charset="0"/>
+                        <a:ea typeface="Calibri" charset="0"/>
+                        <a:cs typeface="Calibri" charset="0"/>
+                      </a:endParaRPr>
+                    </a:p>
+                  </a:txBody>
+                  <a:tcPr anchor="ctr"/>
+                </a:tc>
+                <a:tc>
+                  <a:txBody>
+                    <a:bodyPr/>
+                    <a:lstStyle/>
+                    <a:p>
+                      <a:pPr marL="0" indent="0" algn="ctr">
+                        <a:buNone/>
+                      </a:pPr>
+                      <a:r>
+                        <a:rPr lang="en-US" sz="950" dirty="0">
+                          <a:solidFill>
+                            <a:srgbClr val="4A4A4A"/>
+                          </a:solidFill>
+                          <a:latin typeface="Calibri" pitchFamily="34" charset="0"/>
+                          <a:ea typeface="Calibri" pitchFamily="34" charset="-122"/>
+                          <a:cs typeface="Calibri" pitchFamily="34" charset="-120"/>
+                        </a:rPr>
+                        <a:t>20 h</a:t>
+                      </a:r>
+                      <a:endParaRPr lang="en-US" sz="950" dirty="0">
+                        <a:latin typeface="Calibri" charset="0"/>
+                        <a:ea typeface="Calibri" charset="0"/>
+                        <a:cs typeface="Calibri" charset="0"/>
+                      </a:endParaRPr>
+                    </a:p>
+                  </a:txBody>
+                  <a:tcPr anchor="ctr"/>
+                </a:tc>
+                <a:extLst>
+                  <a:ext uri="{0D108BD9-81ED-4DB2-BD59-A6C34878D82A}">
+                    <a16:rowId xmlns:a16="http://schemas.microsoft.com/office/drawing/2014/main" val="3125275120"/>
+                  </a:ext>
+                </a:extLst>
+              </a:tr>
+              <a:tr h="202361">
+                <a:tc>
+                  <a:txBody>
+                    <a:bodyPr/>
+                    <a:lstStyle/>
+                    <a:p>
+                      <a:pPr marL="0" indent="0">
+                        <a:buNone/>
+                      </a:pPr>
+                      <a:r>
+                        <a:rPr lang="en-US" sz="950" b="1" dirty="0">
+                          <a:solidFill>
+                            <a:schemeClr val="tx1">
+                              <a:lumMod val="95000"/>
+                              <a:lumOff val="5000"/>
+                            </a:schemeClr>
+                          </a:solidFill>
+                          <a:latin typeface="Calibri" pitchFamily="34" charset="0"/>
+                          <a:ea typeface="Calibri" pitchFamily="34" charset="-122"/>
+                          <a:cs typeface="Calibri" pitchFamily="34" charset="-120"/>
+                        </a:rPr>
+                        <a:t>Total</a:t>
+                      </a:r>
+                      <a:endParaRPr lang="en-US" sz="950" dirty="0">
+                        <a:solidFill>
+                          <a:schemeClr val="tx1">
+                            <a:lumMod val="95000"/>
+                            <a:lumOff val="5000"/>
+                          </a:schemeClr>
+                        </a:solidFill>
+                        <a:latin typeface="Calibri" charset="0"/>
+                        <a:ea typeface="Calibri" charset="0"/>
+                        <a:cs typeface="Calibri" charset="0"/>
+                      </a:endParaRPr>
+                    </a:p>
+                  </a:txBody>
+                  <a:tcPr anchor="ctr"/>
+                </a:tc>
+                <a:tc>
+                  <a:txBody>
+                    <a:bodyPr/>
+                    <a:lstStyle/>
+                    <a:p>
+                      <a:pPr marL="0" indent="0">
+                        <a:buNone/>
+                      </a:pPr>
+                      <a:endParaRPr lang="en-US" sz="1200" dirty="0">
+                        <a:latin typeface="Calibri" charset="0"/>
+                        <a:ea typeface="Calibri" charset="0"/>
+                        <a:cs typeface="Calibri" charset="0"/>
+                      </a:endParaRPr>
+                    </a:p>
+                  </a:txBody>
+                  <a:tcPr anchor="ctr"/>
+                </a:tc>
+                <a:tc>
+                  <a:txBody>
+                    <a:bodyPr/>
+                    <a:lstStyle/>
+                    <a:p>
+                      <a:pPr marL="0" indent="0" algn="ctr">
+                        <a:buNone/>
+                      </a:pPr>
+                      <a:r>
+                        <a:rPr lang="en-US" sz="950" b="1" dirty="0">
+                          <a:solidFill>
+                            <a:schemeClr val="tx1">
+                              <a:lumMod val="95000"/>
+                              <a:lumOff val="5000"/>
+                            </a:schemeClr>
+                          </a:solidFill>
+                          <a:latin typeface="Calibri" pitchFamily="34" charset="0"/>
+                          <a:ea typeface="Calibri" pitchFamily="34" charset="-122"/>
+                          <a:cs typeface="Calibri" pitchFamily="34" charset="-120"/>
+                        </a:rPr>
+                        <a:t>241</a:t>
+                      </a:r>
+                      <a:endParaRPr lang="en-US" sz="950" dirty="0">
+                        <a:solidFill>
+                          <a:schemeClr val="tx1">
+                            <a:lumMod val="95000"/>
+                            <a:lumOff val="5000"/>
+                          </a:schemeClr>
+                        </a:solidFill>
+                        <a:latin typeface="Calibri" charset="0"/>
+                        <a:ea typeface="Calibri" charset="0"/>
+                        <a:cs typeface="Calibri" charset="0"/>
+                      </a:endParaRPr>
+                    </a:p>
+                  </a:txBody>
+                  <a:tcPr anchor="ctr"/>
+                </a:tc>
+                <a:tc>
+                  <a:txBody>
+                    <a:bodyPr/>
+                    <a:lstStyle/>
+                    <a:p>
+                      <a:pPr marL="0" indent="0" algn="ctr">
+                        <a:buNone/>
+                      </a:pPr>
+                      <a:r>
+                        <a:rPr lang="en-US" sz="950" b="1" dirty="0">
+                          <a:solidFill>
+                            <a:schemeClr val="tx1">
+                              <a:lumMod val="95000"/>
+                              <a:lumOff val="5000"/>
+                            </a:schemeClr>
+                          </a:solidFill>
+                          <a:latin typeface="Calibri" pitchFamily="34" charset="0"/>
+                          <a:ea typeface="Calibri" pitchFamily="34" charset="-122"/>
+                          <a:cs typeface="Calibri" pitchFamily="34" charset="-120"/>
+                        </a:rPr>
+                        <a:t>3d 5h</a:t>
+                      </a:r>
+                      <a:endParaRPr lang="en-US" sz="950" dirty="0">
+                        <a:solidFill>
+                          <a:schemeClr val="tx1">
+                            <a:lumMod val="95000"/>
+                            <a:lumOff val="5000"/>
+                          </a:schemeClr>
+                        </a:solidFill>
+                        <a:latin typeface="Calibri" charset="0"/>
+                        <a:ea typeface="Calibri" charset="0"/>
+                        <a:cs typeface="Calibri" charset="0"/>
+                      </a:endParaRPr>
+                    </a:p>
+                  </a:txBody>
+                  <a:tcPr anchor="ctr"/>
+                </a:tc>
+                <a:extLst>
+                  <a:ext uri="{0D108BD9-81ED-4DB2-BD59-A6C34878D82A}">
+                    <a16:rowId xmlns:a16="http://schemas.microsoft.com/office/drawing/2014/main" val="3960137268"/>
+                  </a:ext>
+                </a:extLst>
+              </a:tr>
+            </a:tbl>
+          </a:graphicData>
+        </a:graphic>
+      </p:graphicFrame>
     </p:spTree>
   </p:cSld>
   <p:clrMapOvr>
@@ -3549,6 +4017,7 @@
         <a:solidFill>
           <a:srgbClr val="FFFFFF"/>
         </a:solidFill>
+        <a:effectLst/>
       </p:bgPr>
     </p:bg>
     <p:spTree>
@@ -3565,30 +4034,6 @@
           <a:chExt cx="0" cy="0"/>
         </a:xfrm>
       </p:grpSpPr>
-      <p:pic>
-        <p:nvPicPr>
-          <p:cNvPr id="2" name="Image 0" descr="/home/claude/icons/header_gradient.png">    </p:cNvPr>
-          <p:cNvPicPr>
-            <a:picLocks noChangeAspect="1"/>
-          </p:cNvPicPr>
-          <p:nvPr/>
-        </p:nvPicPr>
-        <p:blipFill>
-          <a:blip r:embed="rId1"/>
-          <a:stretch>
-            <a:fillRect/>
-          </a:stretch>
-        </p:blipFill>
-        <p:spPr>
-          <a:xfrm>
-            <a:off x="0" y="0"/>
-            <a:ext cx="12191695" cy="658368"/>
-          </a:xfrm>
-          <a:prstGeom prst="rect">
-            <a:avLst/>
-          </a:prstGeom>
-        </p:spPr>
-      </p:pic>
       <p:sp>
         <p:nvSpPr>
           <p:cNvPr id="3" name="Text 0"/>
@@ -3610,7 +4055,7 @@
           <a:bodyPr wrap="square" lIns="0" tIns="0" rIns="0" bIns="0" rtlCol="0" anchor="ctr"/>
           <a:lstStyle/>
           <a:p>
-            <a:pPr indent="0" marL="0">
+            <a:pPr marL="0" indent="0">
               <a:buNone/>
             </a:pPr>
             <a:r>
@@ -3622,7 +4067,7 @@
                 <a:ea typeface="Calibri" pitchFamily="34" charset="-122"/>
                 <a:cs typeface="Calibri" pitchFamily="34" charset="-120"/>
               </a:rPr>
-              <a:t>FXG Data Pipeline — Load Performance</a:t>
+              <a:t>XG Data Pipeline — Load Performance</a:t>
             </a:r>
             <a:endParaRPr lang="en-US" sz="2200" dirty="0"/>
           </a:p>
@@ -3649,11 +4094,11 @@
           <a:bodyPr wrap="square" lIns="0" tIns="0" rIns="0" bIns="0" rtlCol="0" anchor="ctr"/>
           <a:lstStyle/>
           <a:p>
-            <a:pPr indent="0" marL="0">
+            <a:pPr marL="0" indent="0">
               <a:buNone/>
             </a:pPr>
             <a:r>
-              <a:rPr lang="en-US" sz="1100" b="1" spc="200" kern="0" dirty="0">
+              <a:rPr lang="en-US" sz="1100" b="1" kern="0" spc="200" dirty="0">
                 <a:solidFill>
                   <a:srgbClr val="FF6600"/>
                 </a:solidFill>
@@ -3688,7 +4133,7 @@
           <a:bodyPr wrap="square" lIns="0" tIns="0" rIns="0" bIns="0" rtlCol="0" anchor="ctr"/>
           <a:lstStyle/>
           <a:p>
-            <a:pPr indent="0" marL="0">
+            <a:pPr marL="0" indent="0">
               <a:buNone/>
             </a:pPr>
             <a:r>
@@ -3727,7 +4172,7 @@
           <a:bodyPr wrap="square" lIns="0" tIns="0" rIns="0" bIns="0" rtlCol="0" anchor="ctr"/>
           <a:lstStyle/>
           <a:p>
-            <a:pPr indent="0" marL="0">
+            <a:pPr marL="0" indent="0">
               <a:buNone/>
             </a:pPr>
             <a:r>
@@ -3766,7 +4211,7 @@
           <a:bodyPr wrap="square" lIns="0" tIns="0" rIns="0" bIns="0" rtlCol="0" anchor="ctr"/>
           <a:lstStyle/>
           <a:p>
-            <a:pPr indent="0" marL="0">
+            <a:pPr marL="0" indent="0">
               <a:buNone/>
             </a:pPr>
             <a:r>
@@ -3786,34 +4231,76 @@
       </p:sp>
       <p:graphicFrame>
         <p:nvGraphicFramePr>
-          <p:cNvPr id="3" name="Table 0"/>
+          <p:cNvPr id="8" name="Table 0"/>
           <p:cNvGraphicFramePr>
             <a:graphicFrameLocks noGrp="1"/>
           </p:cNvGraphicFramePr>
           <p:nvPr>
             <p:extLst>
               <p:ext uri="{D42A27DB-BD31-4B8C-83A1-F6EECF244321}">
-                <p14:modId xmlns:p14="http://schemas.microsoft.com/office/powerpoint/2010/main" val="1579011935"/>
+                <p14:modId xmlns:p14="http://schemas.microsoft.com/office/powerpoint/2010/main" val="376490335"/>
               </p:ext>
             </p:extLst>
           </p:nvPr>
         </p:nvGraphicFramePr>
         <p:xfrm>
           <a:off x="365760" y="2167128"/>
-          <a:ext cx="11460175" cy="1371600"/>
+          <a:ext cx="9628632" cy="1478280"/>
         </p:xfrm>
         <a:graphic>
           <a:graphicData uri="http://schemas.openxmlformats.org/drawingml/2006/table">
             <a:tbl>
               <a:tblPr/>
               <a:tblGrid>
-                <a:gridCol w="2788920"/>
-                <a:gridCol w="1554480"/>
-                <a:gridCol w="868680"/>
-                <a:gridCol w="1051560"/>
-                <a:gridCol w="1554480"/>
-                <a:gridCol w="868680"/>
-                <a:gridCol w="941832"/>
+                <a:gridCol w="2788920">
+                  <a:extLst>
+                    <a:ext uri="{9D8B030D-6E8A-4147-A177-3AD203B41FA5}">
+                      <a16:colId xmlns:a16="http://schemas.microsoft.com/office/drawing/2014/main" val="20000"/>
+                    </a:ext>
+                  </a:extLst>
+                </a:gridCol>
+                <a:gridCol w="1554480">
+                  <a:extLst>
+                    <a:ext uri="{9D8B030D-6E8A-4147-A177-3AD203B41FA5}">
+                      <a16:colId xmlns:a16="http://schemas.microsoft.com/office/drawing/2014/main" val="20001"/>
+                    </a:ext>
+                  </a:extLst>
+                </a:gridCol>
+                <a:gridCol w="868680">
+                  <a:extLst>
+                    <a:ext uri="{9D8B030D-6E8A-4147-A177-3AD203B41FA5}">
+                      <a16:colId xmlns:a16="http://schemas.microsoft.com/office/drawing/2014/main" val="20002"/>
+                    </a:ext>
+                  </a:extLst>
+                </a:gridCol>
+                <a:gridCol w="1051560">
+                  <a:extLst>
+                    <a:ext uri="{9D8B030D-6E8A-4147-A177-3AD203B41FA5}">
+                      <a16:colId xmlns:a16="http://schemas.microsoft.com/office/drawing/2014/main" val="20003"/>
+                    </a:ext>
+                  </a:extLst>
+                </a:gridCol>
+                <a:gridCol w="1554480">
+                  <a:extLst>
+                    <a:ext uri="{9D8B030D-6E8A-4147-A177-3AD203B41FA5}">
+                      <a16:colId xmlns:a16="http://schemas.microsoft.com/office/drawing/2014/main" val="20004"/>
+                    </a:ext>
+                  </a:extLst>
+                </a:gridCol>
+                <a:gridCol w="868680">
+                  <a:extLst>
+                    <a:ext uri="{9D8B030D-6E8A-4147-A177-3AD203B41FA5}">
+                      <a16:colId xmlns:a16="http://schemas.microsoft.com/office/drawing/2014/main" val="20005"/>
+                    </a:ext>
+                  </a:extLst>
+                </a:gridCol>
+                <a:gridCol w="941832">
+                  <a:extLst>
+                    <a:ext uri="{9D8B030D-6E8A-4147-A177-3AD203B41FA5}">
+                      <a16:colId xmlns:a16="http://schemas.microsoft.com/office/drawing/2014/main" val="20006"/>
+                    </a:ext>
+                  </a:extLst>
+                </a:gridCol>
               </a:tblGrid>
               <a:tr h="274320">
                 <a:tc>
@@ -3821,7 +4308,7 @@
                     <a:bodyPr/>
                     <a:lstStyle/>
                     <a:p>
-                      <a:pPr indent="0" marL="0">
+                      <a:pPr marL="0" indent="0">
                         <a:buNone/>
                       </a:pPr>
                       <a:r>
@@ -3842,7 +4329,7 @@
                       </a:endParaRPr>
                     </a:p>
                   </a:txBody>
-                  <a:tcPr marL="91440" marR="91440" marT="45720" marB="45720" anchor="ctr">
+                  <a:tcPr anchor="ctr">
                     <a:lnL w="9525" cap="flat" cmpd="sng" algn="ctr">
                       <a:solidFill>
                         <a:srgbClr val="E0D7EC"/>
@@ -3889,7 +4376,7 @@
                     <a:bodyPr/>
                     <a:lstStyle/>
                     <a:p>
-                      <a:pPr algn="ctr" indent="0" marL="0">
+                      <a:pPr marL="0" indent="0" algn="ctr">
                         <a:buNone/>
                       </a:pPr>
                       <a:r>
@@ -3910,7 +4397,7 @@
                       </a:endParaRPr>
                     </a:p>
                   </a:txBody>
-                  <a:tcPr marL="91440" marR="91440" marT="45720" marB="45720" anchor="ctr">
+                  <a:tcPr anchor="ctr">
                     <a:lnL w="9525" cap="flat" cmpd="sng" algn="ctr">
                       <a:solidFill>
                         <a:srgbClr val="E0D7EC"/>
@@ -3957,7 +4444,7 @@
                     <a:bodyPr/>
                     <a:lstStyle/>
                     <a:p>
-                      <a:pPr algn="ctr" indent="0" marL="0">
+                      <a:pPr marL="0" indent="0" algn="ctr">
                         <a:buNone/>
                       </a:pPr>
                       <a:r>
@@ -3978,7 +4465,7 @@
                       </a:endParaRPr>
                     </a:p>
                   </a:txBody>
-                  <a:tcPr marL="91440" marR="91440" marT="45720" marB="45720" anchor="ctr">
+                  <a:tcPr anchor="ctr">
                     <a:lnL w="9525" cap="flat" cmpd="sng" algn="ctr">
                       <a:solidFill>
                         <a:srgbClr val="E0D7EC"/>
@@ -4025,7 +4512,7 @@
                     <a:bodyPr/>
                     <a:lstStyle/>
                     <a:p>
-                      <a:pPr algn="ctr" indent="0" marL="0">
+                      <a:pPr marL="0" indent="0" algn="ctr">
                         <a:buNone/>
                       </a:pPr>
                       <a:r>
@@ -4046,7 +4533,7 @@
                       </a:endParaRPr>
                     </a:p>
                   </a:txBody>
-                  <a:tcPr marL="91440" marR="91440" marT="45720" marB="45720" anchor="ctr">
+                  <a:tcPr anchor="ctr">
                     <a:lnL w="9525" cap="flat" cmpd="sng" algn="ctr">
                       <a:solidFill>
                         <a:srgbClr val="E0D7EC"/>
@@ -4093,7 +4580,7 @@
                     <a:bodyPr/>
                     <a:lstStyle/>
                     <a:p>
-                      <a:pPr algn="ctr" indent="0" marL="0">
+                      <a:pPr marL="0" indent="0" algn="ctr">
                         <a:buNone/>
                       </a:pPr>
                       <a:r>
@@ -4114,7 +4601,7 @@
                       </a:endParaRPr>
                     </a:p>
                   </a:txBody>
-                  <a:tcPr marL="91440" marR="91440" marT="45720" marB="45720" anchor="ctr">
+                  <a:tcPr anchor="ctr">
                     <a:lnL w="9525" cap="flat" cmpd="sng" algn="ctr">
                       <a:solidFill>
                         <a:srgbClr val="E0D7EC"/>
@@ -4161,7 +4648,7 @@
                     <a:bodyPr/>
                     <a:lstStyle/>
                     <a:p>
-                      <a:pPr algn="ctr" indent="0" marL="0">
+                      <a:pPr marL="0" indent="0" algn="ctr">
                         <a:buNone/>
                       </a:pPr>
                       <a:r>
@@ -4182,7 +4669,7 @@
                       </a:endParaRPr>
                     </a:p>
                   </a:txBody>
-                  <a:tcPr marL="91440" marR="91440" marT="45720" marB="45720" anchor="ctr">
+                  <a:tcPr anchor="ctr">
                     <a:lnL w="9525" cap="flat" cmpd="sng" algn="ctr">
                       <a:solidFill>
                         <a:srgbClr val="E0D7EC"/>
@@ -4229,7 +4716,7 @@
                     <a:bodyPr/>
                     <a:lstStyle/>
                     <a:p>
-                      <a:pPr algn="ctr" indent="0" marL="0">
+                      <a:pPr marL="0" indent="0" algn="ctr">
                         <a:buNone/>
                       </a:pPr>
                       <a:r>
@@ -4250,7 +4737,7 @@
                       </a:endParaRPr>
                     </a:p>
                   </a:txBody>
-                  <a:tcPr marL="91440" marR="91440" marT="45720" marB="45720" anchor="ctr">
+                  <a:tcPr anchor="ctr">
                     <a:lnL w="9525" cap="flat" cmpd="sng" algn="ctr">
                       <a:solidFill>
                         <a:srgbClr val="E0D7EC"/>
@@ -4292,6 +4779,11 @@
                     </a:solidFill>
                   </a:tcPr>
                 </a:tc>
+                <a:extLst>
+                  <a:ext uri="{0D108BD9-81ED-4DB2-BD59-A6C34878D82A}">
+                    <a16:rowId xmlns:a16="http://schemas.microsoft.com/office/drawing/2014/main" val="10000"/>
+                  </a:ext>
+                </a:extLst>
               </a:tr>
               <a:tr h="274320">
                 <a:tc>
@@ -4299,28 +4791,29 @@
                     <a:bodyPr/>
                     <a:lstStyle/>
                     <a:p>
-                      <a:pPr algn="l" indent="0" marL="0">
+                      <a:pPr algn="l" fontAlgn="ctr">
                         <a:buNone/>
                       </a:pPr>
                       <a:r>
-                        <a:rPr lang="en-US" sz="950" dirty="0">
+                        <a:rPr lang="en-IN" sz="1000" b="0" i="0" u="none" strike="noStrike" dirty="0" err="1">
                           <a:solidFill>
-                            <a:srgbClr val="4A4A4A"/>
+                            <a:srgbClr val="000000"/>
                           </a:solidFill>
-                          <a:latin typeface="Calibri" pitchFamily="34" charset="0"/>
-                          <a:ea typeface="Calibri" pitchFamily="34" charset="-122"/>
-                          <a:cs typeface="Calibri" pitchFamily="34" charset="-120"/>
+                          <a:effectLst/>
+                          <a:latin typeface="Arial Unicode MS"/>
                         </a:rPr>
-                        <a:t>FXG_glbl_enti_BILL_mth_HIST</a:t>
+                        <a:t>fxg_fac_enti_bill_mth_hist</a:t>
                       </a:r>
-                      <a:endParaRPr lang="en-US" sz="950" dirty="0">
-                        <a:latin typeface="Calibri" charset="0"/>
-                        <a:ea typeface="Calibri" charset="0"/>
-                        <a:cs typeface="Calibri" charset="0"/>
+                      <a:endParaRPr lang="en-IN" sz="1000" b="0" i="0" u="none" strike="noStrike" dirty="0">
+                        <a:solidFill>
+                          <a:srgbClr val="000000"/>
+                        </a:solidFill>
+                        <a:effectLst/>
+                        <a:latin typeface="Arial Unicode MS"/>
                       </a:endParaRPr>
                     </a:p>
                   </a:txBody>
-                  <a:tcPr marL="91440" marR="91440" marT="45720" marB="45720" anchor="ctr">
+                  <a:tcPr marL="95250" marR="6350" marT="6350" marB="0" anchor="ctr">
                     <a:lnL w="9525" cap="flat" cmpd="sng" algn="ctr">
                       <a:solidFill>
                         <a:srgbClr val="E0D7EC"/>
@@ -4367,7 +4860,7 @@
                     <a:bodyPr/>
                     <a:lstStyle/>
                     <a:p>
-                      <a:pPr algn="ctr" indent="0" marL="0">
+                      <a:pPr marL="0" indent="0" algn="ctr">
                         <a:buNone/>
                       </a:pPr>
                       <a:r>
@@ -4388,7 +4881,7 @@
                       </a:endParaRPr>
                     </a:p>
                   </a:txBody>
-                  <a:tcPr marL="91440" marR="91440" marT="45720" marB="45720" anchor="ctr">
+                  <a:tcPr anchor="ctr">
                     <a:lnL w="9525" cap="flat" cmpd="sng" algn="ctr">
                       <a:solidFill>
                         <a:srgbClr val="E0D7EC"/>
@@ -4435,7 +4928,7 @@
                     <a:bodyPr/>
                     <a:lstStyle/>
                     <a:p>
-                      <a:pPr algn="ctr" indent="0" marL="0">
+                      <a:pPr marL="0" indent="0" algn="ctr">
                         <a:buNone/>
                       </a:pPr>
                       <a:r>
@@ -4456,7 +4949,7 @@
                       </a:endParaRPr>
                     </a:p>
                   </a:txBody>
-                  <a:tcPr marL="91440" marR="91440" marT="45720" marB="45720" anchor="ctr">
+                  <a:tcPr anchor="ctr">
                     <a:lnL w="9525" cap="flat" cmpd="sng" algn="ctr">
                       <a:solidFill>
                         <a:srgbClr val="E0D7EC"/>
@@ -4503,7 +4996,7 @@
                     <a:bodyPr/>
                     <a:lstStyle/>
                     <a:p>
-                      <a:pPr algn="ctr" indent="0" marL="0">
+                      <a:pPr marL="0" indent="0" algn="ctr">
                         <a:buNone/>
                       </a:pPr>
                       <a:r>
@@ -4524,7 +5017,7 @@
                       </a:endParaRPr>
                     </a:p>
                   </a:txBody>
-                  <a:tcPr marL="91440" marR="91440" marT="45720" marB="45720" anchor="ctr">
+                  <a:tcPr anchor="ctr">
                     <a:lnL w="9525" cap="flat" cmpd="sng" algn="ctr">
                       <a:solidFill>
                         <a:srgbClr val="E0D7EC"/>
@@ -4571,7 +5064,7 @@
                     <a:bodyPr/>
                     <a:lstStyle/>
                     <a:p>
-                      <a:pPr algn="ctr" indent="0" marL="0">
+                      <a:pPr marL="0" indent="0" algn="ctr">
                         <a:buNone/>
                       </a:pPr>
                       <a:r>
@@ -4592,7 +5085,7 @@
                       </a:endParaRPr>
                     </a:p>
                   </a:txBody>
-                  <a:tcPr marL="91440" marR="91440" marT="45720" marB="45720" anchor="ctr">
+                  <a:tcPr anchor="ctr">
                     <a:lnL w="9525" cap="flat" cmpd="sng" algn="ctr">
                       <a:solidFill>
                         <a:srgbClr val="E0D7EC"/>
@@ -4639,7 +5132,7 @@
                     <a:bodyPr/>
                     <a:lstStyle/>
                     <a:p>
-                      <a:pPr algn="ctr" indent="0" marL="0">
+                      <a:pPr marL="0" indent="0" algn="ctr">
                         <a:buNone/>
                       </a:pPr>
                       <a:r>
@@ -4660,7 +5153,7 @@
                       </a:endParaRPr>
                     </a:p>
                   </a:txBody>
-                  <a:tcPr marL="91440" marR="91440" marT="45720" marB="45720" anchor="ctr">
+                  <a:tcPr anchor="ctr">
                     <a:lnL w="9525" cap="flat" cmpd="sng" algn="ctr">
                       <a:solidFill>
                         <a:srgbClr val="E0D7EC"/>
@@ -4707,7 +5200,7 @@
                     <a:bodyPr/>
                     <a:lstStyle/>
                     <a:p>
-                      <a:pPr algn="ctr" indent="0" marL="0">
+                      <a:pPr marL="0" indent="0" algn="ctr">
                         <a:buNone/>
                       </a:pPr>
                       <a:r>
@@ -4728,7 +5221,7 @@
                       </a:endParaRPr>
                     </a:p>
                   </a:txBody>
-                  <a:tcPr marL="91440" marR="91440" marT="45720" marB="45720" anchor="ctr">
+                  <a:tcPr anchor="ctr">
                     <a:lnL w="9525" cap="flat" cmpd="sng" algn="ctr">
                       <a:solidFill>
                         <a:srgbClr val="E0D7EC"/>
@@ -4770,6 +5263,11 @@
                     </a:solidFill>
                   </a:tcPr>
                 </a:tc>
+                <a:extLst>
+                  <a:ext uri="{0D108BD9-81ED-4DB2-BD59-A6C34878D82A}">
+                    <a16:rowId xmlns:a16="http://schemas.microsoft.com/office/drawing/2014/main" val="10001"/>
+                  </a:ext>
+                </a:extLst>
               </a:tr>
               <a:tr h="274320">
                 <a:tc>
@@ -4777,28 +5275,22 @@
                     <a:bodyPr/>
                     <a:lstStyle/>
                     <a:p>
-                      <a:pPr algn="l" indent="0" marL="0">
+                      <a:pPr algn="l" fontAlgn="ctr">
                         <a:buNone/>
                       </a:pPr>
                       <a:r>
-                        <a:rPr lang="en-US" sz="950" dirty="0">
+                        <a:rPr lang="en-IN" sz="1000" b="0" i="0" u="none" strike="noStrike">
                           <a:solidFill>
-                            <a:srgbClr val="4A4A4A"/>
+                            <a:srgbClr val="000000"/>
                           </a:solidFill>
-                          <a:latin typeface="Calibri" pitchFamily="34" charset="0"/>
-                          <a:ea typeface="Calibri" pitchFamily="34" charset="-122"/>
-                          <a:cs typeface="Calibri" pitchFamily="34" charset="-120"/>
+                          <a:effectLst/>
+                          <a:latin typeface="Arial Unicode MS"/>
                         </a:rPr>
-                        <a:t>FXG_FAC_ENTI_BILL_MTH_HIST</a:t>
+                        <a:t>fxg_ctry_enti_bill_mth_hist</a:t>
                       </a:r>
-                      <a:endParaRPr lang="en-US" sz="950" dirty="0">
-                        <a:latin typeface="Calibri" charset="0"/>
-                        <a:ea typeface="Calibri" charset="0"/>
-                        <a:cs typeface="Calibri" charset="0"/>
-                      </a:endParaRPr>
                     </a:p>
                   </a:txBody>
-                  <a:tcPr marL="91440" marR="91440" marT="45720" marB="45720" anchor="ctr">
+                  <a:tcPr marL="95250" marR="6350" marT="6350" marB="0" anchor="ctr">
                     <a:lnL w="9525" cap="flat" cmpd="sng" algn="ctr">
                       <a:solidFill>
                         <a:srgbClr val="E0D7EC"/>
@@ -4845,7 +5337,7 @@
                     <a:bodyPr/>
                     <a:lstStyle/>
                     <a:p>
-                      <a:pPr algn="ctr" indent="0" marL="0">
+                      <a:pPr marL="0" indent="0" algn="ctr">
                         <a:buNone/>
                       </a:pPr>
                       <a:r>
@@ -4866,7 +5358,7 @@
                       </a:endParaRPr>
                     </a:p>
                   </a:txBody>
-                  <a:tcPr marL="91440" marR="91440" marT="45720" marB="45720" anchor="ctr">
+                  <a:tcPr anchor="ctr">
                     <a:lnL w="9525" cap="flat" cmpd="sng" algn="ctr">
                       <a:solidFill>
                         <a:srgbClr val="E0D7EC"/>
@@ -4913,7 +5405,7 @@
                     <a:bodyPr/>
                     <a:lstStyle/>
                     <a:p>
-                      <a:pPr algn="ctr" indent="0" marL="0">
+                      <a:pPr marL="0" indent="0" algn="ctr">
                         <a:buNone/>
                       </a:pPr>
                       <a:r>
@@ -4934,7 +5426,7 @@
                       </a:endParaRPr>
                     </a:p>
                   </a:txBody>
-                  <a:tcPr marL="91440" marR="91440" marT="45720" marB="45720" anchor="ctr">
+                  <a:tcPr anchor="ctr">
                     <a:lnL w="9525" cap="flat" cmpd="sng" algn="ctr">
                       <a:solidFill>
                         <a:srgbClr val="E0D7EC"/>
@@ -4981,7 +5473,7 @@
                     <a:bodyPr/>
                     <a:lstStyle/>
                     <a:p>
-                      <a:pPr algn="ctr" indent="0" marL="0">
+                      <a:pPr marL="0" indent="0" algn="ctr">
                         <a:buNone/>
                       </a:pPr>
                       <a:r>
@@ -5002,7 +5494,7 @@
                       </a:endParaRPr>
                     </a:p>
                   </a:txBody>
-                  <a:tcPr marL="91440" marR="91440" marT="45720" marB="45720" anchor="ctr">
+                  <a:tcPr anchor="ctr">
                     <a:lnL w="9525" cap="flat" cmpd="sng" algn="ctr">
                       <a:solidFill>
                         <a:srgbClr val="E0D7EC"/>
@@ -5049,7 +5541,7 @@
                     <a:bodyPr/>
                     <a:lstStyle/>
                     <a:p>
-                      <a:pPr algn="ctr" indent="0" marL="0">
+                      <a:pPr marL="0" indent="0" algn="ctr">
                         <a:buNone/>
                       </a:pPr>
                       <a:r>
@@ -5070,7 +5562,7 @@
                       </a:endParaRPr>
                     </a:p>
                   </a:txBody>
-                  <a:tcPr marL="91440" marR="91440" marT="45720" marB="45720" anchor="ctr">
+                  <a:tcPr anchor="ctr">
                     <a:lnL w="9525" cap="flat" cmpd="sng" algn="ctr">
                       <a:solidFill>
                         <a:srgbClr val="E0D7EC"/>
@@ -5117,7 +5609,7 @@
                     <a:bodyPr/>
                     <a:lstStyle/>
                     <a:p>
-                      <a:pPr algn="ctr" indent="0" marL="0">
+                      <a:pPr marL="0" indent="0" algn="ctr">
                         <a:buNone/>
                       </a:pPr>
                       <a:r>
@@ -5138,7 +5630,7 @@
                       </a:endParaRPr>
                     </a:p>
                   </a:txBody>
-                  <a:tcPr marL="91440" marR="91440" marT="45720" marB="45720" anchor="ctr">
+                  <a:tcPr anchor="ctr">
                     <a:lnL w="9525" cap="flat" cmpd="sng" algn="ctr">
                       <a:solidFill>
                         <a:srgbClr val="E0D7EC"/>
@@ -5185,7 +5677,7 @@
                     <a:bodyPr/>
                     <a:lstStyle/>
                     <a:p>
-                      <a:pPr algn="ctr" indent="0" marL="0">
+                      <a:pPr marL="0" indent="0" algn="ctr">
                         <a:buNone/>
                       </a:pPr>
                       <a:r>
@@ -5206,7 +5698,7 @@
                       </a:endParaRPr>
                     </a:p>
                   </a:txBody>
-                  <a:tcPr marL="91440" marR="91440" marT="45720" marB="45720" anchor="ctr">
+                  <a:tcPr anchor="ctr">
                     <a:lnL w="9525" cap="flat" cmpd="sng" algn="ctr">
                       <a:solidFill>
                         <a:srgbClr val="E0D7EC"/>
@@ -5248,6 +5740,11 @@
                     </a:solidFill>
                   </a:tcPr>
                 </a:tc>
+                <a:extLst>
+                  <a:ext uri="{0D108BD9-81ED-4DB2-BD59-A6C34878D82A}">
+                    <a16:rowId xmlns:a16="http://schemas.microsoft.com/office/drawing/2014/main" val="10002"/>
+                  </a:ext>
+                </a:extLst>
               </a:tr>
               <a:tr h="274320">
                 <a:tc>
@@ -5255,28 +5752,29 @@
                     <a:bodyPr/>
                     <a:lstStyle/>
                     <a:p>
-                      <a:pPr algn="l" indent="0" marL="0">
+                      <a:pPr algn="l" fontAlgn="ctr">
                         <a:buNone/>
                       </a:pPr>
                       <a:r>
-                        <a:rPr lang="en-US" sz="950" dirty="0">
+                        <a:rPr lang="en-IN" sz="1000" b="0" i="0" u="none" strike="noStrike" dirty="0" err="1">
                           <a:solidFill>
-                            <a:srgbClr val="4A4A4A"/>
+                            <a:srgbClr val="000000"/>
                           </a:solidFill>
-                          <a:latin typeface="Calibri" pitchFamily="34" charset="0"/>
-                          <a:ea typeface="Calibri" pitchFamily="34" charset="-122"/>
-                          <a:cs typeface="Calibri" pitchFamily="34" charset="-120"/>
+                          <a:effectLst/>
+                          <a:latin typeface="Arial Unicode MS"/>
                         </a:rPr>
-                        <a:t>FXG_CTRY_ENTI_BILL_MTH_HIST</a:t>
+                        <a:t>fxg_glbl_enti_bill_mth_hist</a:t>
                       </a:r>
-                      <a:endParaRPr lang="en-US" sz="950" dirty="0">
-                        <a:latin typeface="Calibri" charset="0"/>
-                        <a:ea typeface="Calibri" charset="0"/>
-                        <a:cs typeface="Calibri" charset="0"/>
+                      <a:endParaRPr lang="en-IN" sz="1000" b="0" i="0" u="none" strike="noStrike" dirty="0">
+                        <a:solidFill>
+                          <a:srgbClr val="000000"/>
+                        </a:solidFill>
+                        <a:effectLst/>
+                        <a:latin typeface="Arial Unicode MS"/>
                       </a:endParaRPr>
                     </a:p>
                   </a:txBody>
-                  <a:tcPr marL="91440" marR="91440" marT="45720" marB="45720" anchor="ctr">
+                  <a:tcPr marL="95250" marR="6350" marT="6350" marB="0" anchor="ctr">
                     <a:lnL w="9525" cap="flat" cmpd="sng" algn="ctr">
                       <a:solidFill>
                         <a:srgbClr val="E0D7EC"/>
@@ -5323,7 +5821,7 @@
                     <a:bodyPr/>
                     <a:lstStyle/>
                     <a:p>
-                      <a:pPr algn="ctr" indent="0" marL="0">
+                      <a:pPr marL="0" indent="0" algn="ctr">
                         <a:buNone/>
                       </a:pPr>
                       <a:r>
@@ -5344,7 +5842,7 @@
                       </a:endParaRPr>
                     </a:p>
                   </a:txBody>
-                  <a:tcPr marL="91440" marR="91440" marT="45720" marB="45720" anchor="ctr">
+                  <a:tcPr anchor="ctr">
                     <a:lnL w="9525" cap="flat" cmpd="sng" algn="ctr">
                       <a:solidFill>
                         <a:srgbClr val="E0D7EC"/>
@@ -5391,7 +5889,7 @@
                     <a:bodyPr/>
                     <a:lstStyle/>
                     <a:p>
-                      <a:pPr algn="ctr" indent="0" marL="0">
+                      <a:pPr marL="0" indent="0" algn="ctr">
                         <a:buNone/>
                       </a:pPr>
                       <a:r>
@@ -5412,7 +5910,7 @@
                       </a:endParaRPr>
                     </a:p>
                   </a:txBody>
-                  <a:tcPr marL="91440" marR="91440" marT="45720" marB="45720" anchor="ctr">
+                  <a:tcPr anchor="ctr">
                     <a:lnL w="9525" cap="flat" cmpd="sng" algn="ctr">
                       <a:solidFill>
                         <a:srgbClr val="E0D7EC"/>
@@ -5459,7 +5957,7 @@
                     <a:bodyPr/>
                     <a:lstStyle/>
                     <a:p>
-                      <a:pPr algn="ctr" indent="0" marL="0">
+                      <a:pPr marL="0" indent="0" algn="ctr">
                         <a:buNone/>
                       </a:pPr>
                       <a:r>
@@ -5480,7 +5978,7 @@
                       </a:endParaRPr>
                     </a:p>
                   </a:txBody>
-                  <a:tcPr marL="91440" marR="91440" marT="45720" marB="45720" anchor="ctr">
+                  <a:tcPr anchor="ctr">
                     <a:lnL w="9525" cap="flat" cmpd="sng" algn="ctr">
                       <a:solidFill>
                         <a:srgbClr val="E0D7EC"/>
@@ -5527,7 +6025,7 @@
                     <a:bodyPr/>
                     <a:lstStyle/>
                     <a:p>
-                      <a:pPr algn="ctr" indent="0" marL="0">
+                      <a:pPr marL="0" indent="0" algn="ctr">
                         <a:buNone/>
                       </a:pPr>
                       <a:r>
@@ -5548,7 +6046,7 @@
                       </a:endParaRPr>
                     </a:p>
                   </a:txBody>
-                  <a:tcPr marL="91440" marR="91440" marT="45720" marB="45720" anchor="ctr">
+                  <a:tcPr anchor="ctr">
                     <a:lnL w="9525" cap="flat" cmpd="sng" algn="ctr">
                       <a:solidFill>
                         <a:srgbClr val="E0D7EC"/>
@@ -5595,7 +6093,7 @@
                     <a:bodyPr/>
                     <a:lstStyle/>
                     <a:p>
-                      <a:pPr algn="ctr" indent="0" marL="0">
+                      <a:pPr marL="0" indent="0" algn="ctr">
                         <a:buNone/>
                       </a:pPr>
                       <a:r>
@@ -5616,7 +6114,7 @@
                       </a:endParaRPr>
                     </a:p>
                   </a:txBody>
-                  <a:tcPr marL="91440" marR="91440" marT="45720" marB="45720" anchor="ctr">
+                  <a:tcPr anchor="ctr">
                     <a:lnL w="9525" cap="flat" cmpd="sng" algn="ctr">
                       <a:solidFill>
                         <a:srgbClr val="E0D7EC"/>
@@ -5663,7 +6161,7 @@
                     <a:bodyPr/>
                     <a:lstStyle/>
                     <a:p>
-                      <a:pPr algn="ctr" indent="0" marL="0">
+                      <a:pPr marL="0" indent="0" algn="ctr">
                         <a:buNone/>
                       </a:pPr>
                       <a:r>
@@ -5684,7 +6182,7 @@
                       </a:endParaRPr>
                     </a:p>
                   </a:txBody>
-                  <a:tcPr marL="91440" marR="91440" marT="45720" marB="45720" anchor="ctr">
+                  <a:tcPr anchor="ctr">
                     <a:lnL w="9525" cap="flat" cmpd="sng" algn="ctr">
                       <a:solidFill>
                         <a:srgbClr val="E0D7EC"/>
@@ -5726,6 +6224,11 @@
                     </a:solidFill>
                   </a:tcPr>
                 </a:tc>
+                <a:extLst>
+                  <a:ext uri="{0D108BD9-81ED-4DB2-BD59-A6C34878D82A}">
+                    <a16:rowId xmlns:a16="http://schemas.microsoft.com/office/drawing/2014/main" val="10003"/>
+                  </a:ext>
+                </a:extLst>
               </a:tr>
               <a:tr h="274320">
                 <a:tc>
@@ -5733,7 +6236,7 @@
                     <a:bodyPr/>
                     <a:lstStyle/>
                     <a:p>
-                      <a:pPr indent="0" marL="0">
+                      <a:pPr marL="0" indent="0">
                         <a:buNone/>
                       </a:pPr>
                       <a:r>
@@ -5754,7 +6257,7 @@
                       </a:endParaRPr>
                     </a:p>
                   </a:txBody>
-                  <a:tcPr marL="91440" marR="91440" marT="45720" marB="45720" anchor="ctr">
+                  <a:tcPr anchor="ctr">
                     <a:lnL w="9525" cap="flat" cmpd="sng" algn="ctr">
                       <a:solidFill>
                         <a:srgbClr val="E0D7EC"/>
@@ -5801,7 +6304,7 @@
                     <a:bodyPr/>
                     <a:lstStyle/>
                     <a:p>
-                      <a:pPr indent="0" marL="0">
+                      <a:pPr marL="0" indent="0">
                         <a:buNone/>
                       </a:pPr>
                       <a:endParaRPr lang="en-US" sz="1200" dirty="0">
@@ -5811,7 +6314,7 @@
                       </a:endParaRPr>
                     </a:p>
                   </a:txBody>
-                  <a:tcPr marL="91440" marR="91440" marT="45720" marB="45720" anchor="ctr">
+                  <a:tcPr anchor="ctr">
                     <a:lnL w="9525" cap="flat" cmpd="sng" algn="ctr">
                       <a:solidFill>
                         <a:srgbClr val="E0D7EC"/>
@@ -5858,7 +6361,7 @@
                     <a:bodyPr/>
                     <a:lstStyle/>
                     <a:p>
-                      <a:pPr algn="ctr" indent="0" marL="0">
+                      <a:pPr marL="0" indent="0" algn="ctr">
                         <a:buNone/>
                       </a:pPr>
                       <a:r>
@@ -5879,7 +6382,7 @@
                       </a:endParaRPr>
                     </a:p>
                   </a:txBody>
-                  <a:tcPr marL="91440" marR="91440" marT="45720" marB="45720" anchor="ctr">
+                  <a:tcPr anchor="ctr">
                     <a:lnL w="9525" cap="flat" cmpd="sng" algn="ctr">
                       <a:solidFill>
                         <a:srgbClr val="E0D7EC"/>
@@ -5926,7 +6429,7 @@
                     <a:bodyPr/>
                     <a:lstStyle/>
                     <a:p>
-                      <a:pPr algn="ctr" indent="0" marL="0">
+                      <a:pPr marL="0" indent="0" algn="ctr">
                         <a:buNone/>
                       </a:pPr>
                       <a:r>
@@ -5947,7 +6450,7 @@
                       </a:endParaRPr>
                     </a:p>
                   </a:txBody>
-                  <a:tcPr marL="91440" marR="91440" marT="45720" marB="45720" anchor="ctr">
+                  <a:tcPr anchor="ctr">
                     <a:lnL w="9525" cap="flat" cmpd="sng" algn="ctr">
                       <a:solidFill>
                         <a:srgbClr val="E0D7EC"/>
@@ -5994,7 +6497,7 @@
                     <a:bodyPr/>
                     <a:lstStyle/>
                     <a:p>
-                      <a:pPr indent="0" marL="0">
+                      <a:pPr marL="0" indent="0">
                         <a:buNone/>
                       </a:pPr>
                       <a:endParaRPr lang="en-US" sz="1200" dirty="0">
@@ -6004,7 +6507,7 @@
                       </a:endParaRPr>
                     </a:p>
                   </a:txBody>
-                  <a:tcPr marL="91440" marR="91440" marT="45720" marB="45720" anchor="ctr">
+                  <a:tcPr anchor="ctr">
                     <a:lnL w="9525" cap="flat" cmpd="sng" algn="ctr">
                       <a:solidFill>
                         <a:srgbClr val="E0D7EC"/>
@@ -6051,7 +6554,7 @@
                     <a:bodyPr/>
                     <a:lstStyle/>
                     <a:p>
-                      <a:pPr algn="ctr" indent="0" marL="0">
+                      <a:pPr marL="0" indent="0" algn="ctr">
                         <a:buNone/>
                       </a:pPr>
                       <a:r>
@@ -6072,7 +6575,7 @@
                       </a:endParaRPr>
                     </a:p>
                   </a:txBody>
-                  <a:tcPr marL="91440" marR="91440" marT="45720" marB="45720" anchor="ctr">
+                  <a:tcPr anchor="ctr">
                     <a:lnL w="9525" cap="flat" cmpd="sng" algn="ctr">
                       <a:solidFill>
                         <a:srgbClr val="E0D7EC"/>
@@ -6119,7 +6622,7 @@
                     <a:bodyPr/>
                     <a:lstStyle/>
                     <a:p>
-                      <a:pPr algn="ctr" indent="0" marL="0">
+                      <a:pPr marL="0" indent="0" algn="ctr">
                         <a:buNone/>
                       </a:pPr>
                       <a:r>
@@ -6140,7 +6643,7 @@
                       </a:endParaRPr>
                     </a:p>
                   </a:txBody>
-                  <a:tcPr marL="91440" marR="91440" marT="45720" marB="45720" anchor="ctr">
+                  <a:tcPr anchor="ctr">
                     <a:lnL w="9525" cap="flat" cmpd="sng" algn="ctr">
                       <a:solidFill>
                         <a:srgbClr val="E0D7EC"/>
@@ -6182,6 +6685,11 @@
                     </a:solidFill>
                   </a:tcPr>
                 </a:tc>
+                <a:extLst>
+                  <a:ext uri="{0D108BD9-81ED-4DB2-BD59-A6C34878D82A}">
+                    <a16:rowId xmlns:a16="http://schemas.microsoft.com/office/drawing/2014/main" val="10004"/>
+                  </a:ext>
+                </a:extLst>
               </a:tr>
             </a:tbl>
           </a:graphicData>
@@ -6208,7 +6716,7 @@
           <a:bodyPr wrap="square" lIns="0" tIns="0" rIns="0" bIns="0" rtlCol="0" anchor="ctr"/>
           <a:lstStyle/>
           <a:p>
-            <a:pPr indent="0" marL="0">
+            <a:pPr marL="0" indent="0">
               <a:buNone/>
             </a:pPr>
             <a:r>
@@ -6228,7 +6736,7 @@
       </p:sp>
       <p:graphicFrame>
         <p:nvGraphicFramePr>
-          <p:cNvPr id="5" name="Table 1"/>
+          <p:cNvPr id="10" name="Table 1"/>
           <p:cNvGraphicFramePr>
             <a:graphicFrameLocks noGrp="1"/>
           </p:cNvGraphicFramePr>
@@ -6242,20 +6750,62 @@
         </p:nvGraphicFramePr>
         <p:xfrm>
           <a:off x="365760" y="3941064"/>
-          <a:ext cx="11460175" cy="1097280"/>
+          <a:ext cx="9628632" cy="1203960"/>
         </p:xfrm>
         <a:graphic>
           <a:graphicData uri="http://schemas.openxmlformats.org/drawingml/2006/table">
             <a:tbl>
               <a:tblPr/>
               <a:tblGrid>
-                <a:gridCol w="2788920"/>
-                <a:gridCol w="1554480"/>
-                <a:gridCol w="868680"/>
-                <a:gridCol w="1051560"/>
-                <a:gridCol w="1554480"/>
-                <a:gridCol w="868680"/>
-                <a:gridCol w="941832"/>
+                <a:gridCol w="2788920">
+                  <a:extLst>
+                    <a:ext uri="{9D8B030D-6E8A-4147-A177-3AD203B41FA5}">
+                      <a16:colId xmlns:a16="http://schemas.microsoft.com/office/drawing/2014/main" val="20000"/>
+                    </a:ext>
+                  </a:extLst>
+                </a:gridCol>
+                <a:gridCol w="1554480">
+                  <a:extLst>
+                    <a:ext uri="{9D8B030D-6E8A-4147-A177-3AD203B41FA5}">
+                      <a16:colId xmlns:a16="http://schemas.microsoft.com/office/drawing/2014/main" val="20001"/>
+                    </a:ext>
+                  </a:extLst>
+                </a:gridCol>
+                <a:gridCol w="868680">
+                  <a:extLst>
+                    <a:ext uri="{9D8B030D-6E8A-4147-A177-3AD203B41FA5}">
+                      <a16:colId xmlns:a16="http://schemas.microsoft.com/office/drawing/2014/main" val="20002"/>
+                    </a:ext>
+                  </a:extLst>
+                </a:gridCol>
+                <a:gridCol w="1051560">
+                  <a:extLst>
+                    <a:ext uri="{9D8B030D-6E8A-4147-A177-3AD203B41FA5}">
+                      <a16:colId xmlns:a16="http://schemas.microsoft.com/office/drawing/2014/main" val="20003"/>
+                    </a:ext>
+                  </a:extLst>
+                </a:gridCol>
+                <a:gridCol w="1554480">
+                  <a:extLst>
+                    <a:ext uri="{9D8B030D-6E8A-4147-A177-3AD203B41FA5}">
+                      <a16:colId xmlns:a16="http://schemas.microsoft.com/office/drawing/2014/main" val="20004"/>
+                    </a:ext>
+                  </a:extLst>
+                </a:gridCol>
+                <a:gridCol w="868680">
+                  <a:extLst>
+                    <a:ext uri="{9D8B030D-6E8A-4147-A177-3AD203B41FA5}">
+                      <a16:colId xmlns:a16="http://schemas.microsoft.com/office/drawing/2014/main" val="20005"/>
+                    </a:ext>
+                  </a:extLst>
+                </a:gridCol>
+                <a:gridCol w="941832">
+                  <a:extLst>
+                    <a:ext uri="{9D8B030D-6E8A-4147-A177-3AD203B41FA5}">
+                      <a16:colId xmlns:a16="http://schemas.microsoft.com/office/drawing/2014/main" val="20006"/>
+                    </a:ext>
+                  </a:extLst>
+                </a:gridCol>
               </a:tblGrid>
               <a:tr h="274320">
                 <a:tc>
@@ -6263,7 +6813,7 @@
                     <a:bodyPr/>
                     <a:lstStyle/>
                     <a:p>
-                      <a:pPr indent="0" marL="0">
+                      <a:pPr marL="0" indent="0">
                         <a:buNone/>
                       </a:pPr>
                       <a:r>
@@ -6284,7 +6834,7 @@
                       </a:endParaRPr>
                     </a:p>
                   </a:txBody>
-                  <a:tcPr marL="91440" marR="91440" marT="45720" marB="45720" anchor="ctr">
+                  <a:tcPr anchor="ctr">
                     <a:lnL w="9525" cap="flat" cmpd="sng" algn="ctr">
                       <a:solidFill>
                         <a:srgbClr val="E0D7EC"/>
@@ -6331,7 +6881,7 @@
                     <a:bodyPr/>
                     <a:lstStyle/>
                     <a:p>
-                      <a:pPr algn="ctr" indent="0" marL="0">
+                      <a:pPr marL="0" indent="0" algn="ctr">
                         <a:buNone/>
                       </a:pPr>
                       <a:r>
@@ -6352,7 +6902,7 @@
                       </a:endParaRPr>
                     </a:p>
                   </a:txBody>
-                  <a:tcPr marL="91440" marR="91440" marT="45720" marB="45720" anchor="ctr">
+                  <a:tcPr anchor="ctr">
                     <a:lnL w="9525" cap="flat" cmpd="sng" algn="ctr">
                       <a:solidFill>
                         <a:srgbClr val="E0D7EC"/>
@@ -6399,7 +6949,7 @@
                     <a:bodyPr/>
                     <a:lstStyle/>
                     <a:p>
-                      <a:pPr algn="ctr" indent="0" marL="0">
+                      <a:pPr marL="0" indent="0" algn="ctr">
                         <a:buNone/>
                       </a:pPr>
                       <a:r>
@@ -6420,7 +6970,7 @@
                       </a:endParaRPr>
                     </a:p>
                   </a:txBody>
-                  <a:tcPr marL="91440" marR="91440" marT="45720" marB="45720" anchor="ctr">
+                  <a:tcPr anchor="ctr">
                     <a:lnL w="9525" cap="flat" cmpd="sng" algn="ctr">
                       <a:solidFill>
                         <a:srgbClr val="E0D7EC"/>
@@ -6467,7 +7017,7 @@
                     <a:bodyPr/>
                     <a:lstStyle/>
                     <a:p>
-                      <a:pPr algn="ctr" indent="0" marL="0">
+                      <a:pPr marL="0" indent="0" algn="ctr">
                         <a:buNone/>
                       </a:pPr>
                       <a:r>
@@ -6488,7 +7038,7 @@
                       </a:endParaRPr>
                     </a:p>
                   </a:txBody>
-                  <a:tcPr marL="91440" marR="91440" marT="45720" marB="45720" anchor="ctr">
+                  <a:tcPr anchor="ctr">
                     <a:lnL w="9525" cap="flat" cmpd="sng" algn="ctr">
                       <a:solidFill>
                         <a:srgbClr val="E0D7EC"/>
@@ -6535,7 +7085,7 @@
                     <a:bodyPr/>
                     <a:lstStyle/>
                     <a:p>
-                      <a:pPr algn="ctr" indent="0" marL="0">
+                      <a:pPr marL="0" indent="0" algn="ctr">
                         <a:buNone/>
                       </a:pPr>
                       <a:r>
@@ -6556,7 +7106,7 @@
                       </a:endParaRPr>
                     </a:p>
                   </a:txBody>
-                  <a:tcPr marL="91440" marR="91440" marT="45720" marB="45720" anchor="ctr">
+                  <a:tcPr anchor="ctr">
                     <a:lnL w="9525" cap="flat" cmpd="sng" algn="ctr">
                       <a:solidFill>
                         <a:srgbClr val="E0D7EC"/>
@@ -6603,7 +7153,7 @@
                     <a:bodyPr/>
                     <a:lstStyle/>
                     <a:p>
-                      <a:pPr algn="ctr" indent="0" marL="0">
+                      <a:pPr marL="0" indent="0" algn="ctr">
                         <a:buNone/>
                       </a:pPr>
                       <a:r>
@@ -6624,7 +7174,7 @@
                       </a:endParaRPr>
                     </a:p>
                   </a:txBody>
-                  <a:tcPr marL="91440" marR="91440" marT="45720" marB="45720" anchor="ctr">
+                  <a:tcPr anchor="ctr">
                     <a:lnL w="9525" cap="flat" cmpd="sng" algn="ctr">
                       <a:solidFill>
                         <a:srgbClr val="E0D7EC"/>
@@ -6671,7 +7221,7 @@
                     <a:bodyPr/>
                     <a:lstStyle/>
                     <a:p>
-                      <a:pPr algn="ctr" indent="0" marL="0">
+                      <a:pPr marL="0" indent="0" algn="ctr">
                         <a:buNone/>
                       </a:pPr>
                       <a:r>
@@ -6692,7 +7242,7 @@
                       </a:endParaRPr>
                     </a:p>
                   </a:txBody>
-                  <a:tcPr marL="91440" marR="91440" marT="45720" marB="45720" anchor="ctr">
+                  <a:tcPr anchor="ctr">
                     <a:lnL w="9525" cap="flat" cmpd="sng" algn="ctr">
                       <a:solidFill>
                         <a:srgbClr val="E0D7EC"/>
@@ -6734,6 +7284,11 @@
                     </a:solidFill>
                   </a:tcPr>
                 </a:tc>
+                <a:extLst>
+                  <a:ext uri="{0D108BD9-81ED-4DB2-BD59-A6C34878D82A}">
+                    <a16:rowId xmlns:a16="http://schemas.microsoft.com/office/drawing/2014/main" val="10000"/>
+                  </a:ext>
+                </a:extLst>
               </a:tr>
               <a:tr h="274320">
                 <a:tc>
@@ -6741,7 +7296,7 @@
                     <a:bodyPr/>
                     <a:lstStyle/>
                     <a:p>
-                      <a:pPr algn="l" indent="0" marL="0">
+                      <a:pPr marL="0" indent="0" algn="l">
                         <a:buNone/>
                       </a:pPr>
                       <a:r>
@@ -6762,7 +7317,7 @@
                       </a:endParaRPr>
                     </a:p>
                   </a:txBody>
-                  <a:tcPr marL="91440" marR="91440" marT="45720" marB="45720" anchor="ctr">
+                  <a:tcPr anchor="ctr">
                     <a:lnL w="9525" cap="flat" cmpd="sng" algn="ctr">
                       <a:solidFill>
                         <a:srgbClr val="E0D7EC"/>
@@ -6809,7 +7364,7 @@
                     <a:bodyPr/>
                     <a:lstStyle/>
                     <a:p>
-                      <a:pPr algn="ctr" indent="0" marL="0">
+                      <a:pPr marL="0" indent="0" algn="ctr">
                         <a:buNone/>
                       </a:pPr>
                       <a:r>
@@ -6830,7 +7385,7 @@
                       </a:endParaRPr>
                     </a:p>
                   </a:txBody>
-                  <a:tcPr marL="91440" marR="91440" marT="45720" marB="45720" anchor="ctr">
+                  <a:tcPr anchor="ctr">
                     <a:lnL w="9525" cap="flat" cmpd="sng" algn="ctr">
                       <a:solidFill>
                         <a:srgbClr val="E0D7EC"/>
@@ -6877,7 +7432,7 @@
                     <a:bodyPr/>
                     <a:lstStyle/>
                     <a:p>
-                      <a:pPr algn="ctr" indent="0" marL="0">
+                      <a:pPr marL="0" indent="0" algn="ctr">
                         <a:buNone/>
                       </a:pPr>
                       <a:r>
@@ -6898,7 +7453,7 @@
                       </a:endParaRPr>
                     </a:p>
                   </a:txBody>
-                  <a:tcPr marL="91440" marR="91440" marT="45720" marB="45720" anchor="ctr">
+                  <a:tcPr anchor="ctr">
                     <a:lnL w="9525" cap="flat" cmpd="sng" algn="ctr">
                       <a:solidFill>
                         <a:srgbClr val="E0D7EC"/>
@@ -6945,7 +7500,7 @@
                     <a:bodyPr/>
                     <a:lstStyle/>
                     <a:p>
-                      <a:pPr algn="ctr" indent="0" marL="0">
+                      <a:pPr marL="0" indent="0" algn="ctr">
                         <a:buNone/>
                       </a:pPr>
                       <a:r>
@@ -6966,7 +7521,7 @@
                       </a:endParaRPr>
                     </a:p>
                   </a:txBody>
-                  <a:tcPr marL="91440" marR="91440" marT="45720" marB="45720" anchor="ctr">
+                  <a:tcPr anchor="ctr">
                     <a:lnL w="9525" cap="flat" cmpd="sng" algn="ctr">
                       <a:solidFill>
                         <a:srgbClr val="E0D7EC"/>
@@ -7013,7 +7568,7 @@
                     <a:bodyPr/>
                     <a:lstStyle/>
                     <a:p>
-                      <a:pPr algn="ctr" indent="0" marL="0">
+                      <a:pPr marL="0" indent="0" algn="ctr">
                         <a:buNone/>
                       </a:pPr>
                       <a:r>
@@ -7034,7 +7589,7 @@
                       </a:endParaRPr>
                     </a:p>
                   </a:txBody>
-                  <a:tcPr marL="91440" marR="91440" marT="45720" marB="45720" anchor="ctr">
+                  <a:tcPr anchor="ctr">
                     <a:lnL w="9525" cap="flat" cmpd="sng" algn="ctr">
                       <a:solidFill>
                         <a:srgbClr val="E0D7EC"/>
@@ -7081,7 +7636,7 @@
                     <a:bodyPr/>
                     <a:lstStyle/>
                     <a:p>
-                      <a:pPr algn="ctr" indent="0" marL="0">
+                      <a:pPr marL="0" indent="0" algn="ctr">
                         <a:buNone/>
                       </a:pPr>
                       <a:r>
@@ -7102,7 +7657,7 @@
                       </a:endParaRPr>
                     </a:p>
                   </a:txBody>
-                  <a:tcPr marL="91440" marR="91440" marT="45720" marB="45720" anchor="ctr">
+                  <a:tcPr anchor="ctr">
                     <a:lnL w="9525" cap="flat" cmpd="sng" algn="ctr">
                       <a:solidFill>
                         <a:srgbClr val="E0D7EC"/>
@@ -7149,7 +7704,7 @@
                     <a:bodyPr/>
                     <a:lstStyle/>
                     <a:p>
-                      <a:pPr algn="ctr" indent="0" marL="0">
+                      <a:pPr marL="0" indent="0" algn="ctr">
                         <a:buNone/>
                       </a:pPr>
                       <a:r>
@@ -7170,7 +7725,7 @@
                       </a:endParaRPr>
                     </a:p>
                   </a:txBody>
-                  <a:tcPr marL="91440" marR="91440" marT="45720" marB="45720" anchor="ctr">
+                  <a:tcPr anchor="ctr">
                     <a:lnL w="9525" cap="flat" cmpd="sng" algn="ctr">
                       <a:solidFill>
                         <a:srgbClr val="E0D7EC"/>
@@ -7212,6 +7767,11 @@
                     </a:solidFill>
                   </a:tcPr>
                 </a:tc>
+                <a:extLst>
+                  <a:ext uri="{0D108BD9-81ED-4DB2-BD59-A6C34878D82A}">
+                    <a16:rowId xmlns:a16="http://schemas.microsoft.com/office/drawing/2014/main" val="10001"/>
+                  </a:ext>
+                </a:extLst>
               </a:tr>
               <a:tr h="274320">
                 <a:tc>
@@ -7219,7 +7779,7 @@
                     <a:bodyPr/>
                     <a:lstStyle/>
                     <a:p>
-                      <a:pPr algn="l" indent="0" marL="0">
+                      <a:pPr marL="0" indent="0" algn="l">
                         <a:buNone/>
                       </a:pPr>
                       <a:r>
@@ -7240,7 +7800,7 @@
                       </a:endParaRPr>
                     </a:p>
                   </a:txBody>
-                  <a:tcPr marL="91440" marR="91440" marT="45720" marB="45720" anchor="ctr">
+                  <a:tcPr anchor="ctr">
                     <a:lnL w="9525" cap="flat" cmpd="sng" algn="ctr">
                       <a:solidFill>
                         <a:srgbClr val="E0D7EC"/>
@@ -7287,7 +7847,7 @@
                     <a:bodyPr/>
                     <a:lstStyle/>
                     <a:p>
-                      <a:pPr algn="ctr" indent="0" marL="0">
+                      <a:pPr marL="0" indent="0" algn="ctr">
                         <a:buNone/>
                       </a:pPr>
                       <a:r>
@@ -7308,7 +7868,7 @@
                       </a:endParaRPr>
                     </a:p>
                   </a:txBody>
-                  <a:tcPr marL="91440" marR="91440" marT="45720" marB="45720" anchor="ctr">
+                  <a:tcPr anchor="ctr">
                     <a:lnL w="9525" cap="flat" cmpd="sng" algn="ctr">
                       <a:solidFill>
                         <a:srgbClr val="E0D7EC"/>
@@ -7355,7 +7915,7 @@
                     <a:bodyPr/>
                     <a:lstStyle/>
                     <a:p>
-                      <a:pPr algn="ctr" indent="0" marL="0">
+                      <a:pPr marL="0" indent="0" algn="ctr">
                         <a:buNone/>
                       </a:pPr>
                       <a:r>
@@ -7376,7 +7936,7 @@
                       </a:endParaRPr>
                     </a:p>
                   </a:txBody>
-                  <a:tcPr marL="91440" marR="91440" marT="45720" marB="45720" anchor="ctr">
+                  <a:tcPr anchor="ctr">
                     <a:lnL w="9525" cap="flat" cmpd="sng" algn="ctr">
                       <a:solidFill>
                         <a:srgbClr val="E0D7EC"/>
@@ -7423,7 +7983,7 @@
                     <a:bodyPr/>
                     <a:lstStyle/>
                     <a:p>
-                      <a:pPr algn="ctr" indent="0" marL="0">
+                      <a:pPr marL="0" indent="0" algn="ctr">
                         <a:buNone/>
                       </a:pPr>
                       <a:r>
@@ -7444,7 +8004,7 @@
                       </a:endParaRPr>
                     </a:p>
                   </a:txBody>
-                  <a:tcPr marL="91440" marR="91440" marT="45720" marB="45720" anchor="ctr">
+                  <a:tcPr anchor="ctr">
                     <a:lnL w="9525" cap="flat" cmpd="sng" algn="ctr">
                       <a:solidFill>
                         <a:srgbClr val="E0D7EC"/>
@@ -7491,7 +8051,7 @@
                     <a:bodyPr/>
                     <a:lstStyle/>
                     <a:p>
-                      <a:pPr algn="ctr" indent="0" marL="0">
+                      <a:pPr marL="0" indent="0" algn="ctr">
                         <a:buNone/>
                       </a:pPr>
                       <a:r>
@@ -7512,7 +8072,7 @@
                       </a:endParaRPr>
                     </a:p>
                   </a:txBody>
-                  <a:tcPr marL="91440" marR="91440" marT="45720" marB="45720" anchor="ctr">
+                  <a:tcPr anchor="ctr">
                     <a:lnL w="9525" cap="flat" cmpd="sng" algn="ctr">
                       <a:solidFill>
                         <a:srgbClr val="E0D7EC"/>
@@ -7559,7 +8119,7 @@
                     <a:bodyPr/>
                     <a:lstStyle/>
                     <a:p>
-                      <a:pPr algn="ctr" indent="0" marL="0">
+                      <a:pPr marL="0" indent="0" algn="ctr">
                         <a:buNone/>
                       </a:pPr>
                       <a:r>
@@ -7580,7 +8140,7 @@
                       </a:endParaRPr>
                     </a:p>
                   </a:txBody>
-                  <a:tcPr marL="91440" marR="91440" marT="45720" marB="45720" anchor="ctr">
+                  <a:tcPr anchor="ctr">
                     <a:lnL w="9525" cap="flat" cmpd="sng" algn="ctr">
                       <a:solidFill>
                         <a:srgbClr val="E0D7EC"/>
@@ -7627,7 +8187,7 @@
                     <a:bodyPr/>
                     <a:lstStyle/>
                     <a:p>
-                      <a:pPr algn="ctr" indent="0" marL="0">
+                      <a:pPr marL="0" indent="0" algn="ctr">
                         <a:buNone/>
                       </a:pPr>
                       <a:r>
@@ -7648,7 +8208,7 @@
                       </a:endParaRPr>
                     </a:p>
                   </a:txBody>
-                  <a:tcPr marL="91440" marR="91440" marT="45720" marB="45720" anchor="ctr">
+                  <a:tcPr anchor="ctr">
                     <a:lnL w="9525" cap="flat" cmpd="sng" algn="ctr">
                       <a:solidFill>
                         <a:srgbClr val="E0D7EC"/>
@@ -7690,6 +8250,11 @@
                     </a:solidFill>
                   </a:tcPr>
                 </a:tc>
+                <a:extLst>
+                  <a:ext uri="{0D108BD9-81ED-4DB2-BD59-A6C34878D82A}">
+                    <a16:rowId xmlns:a16="http://schemas.microsoft.com/office/drawing/2014/main" val="10002"/>
+                  </a:ext>
+                </a:extLst>
               </a:tr>
               <a:tr h="274320">
                 <a:tc>
@@ -7697,7 +8262,7 @@
                     <a:bodyPr/>
                     <a:lstStyle/>
                     <a:p>
-                      <a:pPr indent="0" marL="0">
+                      <a:pPr marL="0" indent="0">
                         <a:buNone/>
                       </a:pPr>
                       <a:r>
@@ -7718,7 +8283,7 @@
                       </a:endParaRPr>
                     </a:p>
                   </a:txBody>
-                  <a:tcPr marL="91440" marR="91440" marT="45720" marB="45720" anchor="ctr">
+                  <a:tcPr anchor="ctr">
                     <a:lnL w="9525" cap="flat" cmpd="sng" algn="ctr">
                       <a:solidFill>
                         <a:srgbClr val="E0D7EC"/>
@@ -7765,7 +8330,7 @@
                     <a:bodyPr/>
                     <a:lstStyle/>
                     <a:p>
-                      <a:pPr indent="0" marL="0">
+                      <a:pPr marL="0" indent="0">
                         <a:buNone/>
                       </a:pPr>
                       <a:endParaRPr lang="en-US" sz="1200" dirty="0">
@@ -7775,7 +8340,7 @@
                       </a:endParaRPr>
                     </a:p>
                   </a:txBody>
-                  <a:tcPr marL="91440" marR="91440" marT="45720" marB="45720" anchor="ctr">
+                  <a:tcPr anchor="ctr">
                     <a:lnL w="9525" cap="flat" cmpd="sng" algn="ctr">
                       <a:solidFill>
                         <a:srgbClr val="E0D7EC"/>
@@ -7822,7 +8387,7 @@
                     <a:bodyPr/>
                     <a:lstStyle/>
                     <a:p>
-                      <a:pPr algn="ctr" indent="0" marL="0">
+                      <a:pPr marL="0" indent="0" algn="ctr">
                         <a:buNone/>
                       </a:pPr>
                       <a:r>
@@ -7843,7 +8408,7 @@
                       </a:endParaRPr>
                     </a:p>
                   </a:txBody>
-                  <a:tcPr marL="91440" marR="91440" marT="45720" marB="45720" anchor="ctr">
+                  <a:tcPr anchor="ctr">
                     <a:lnL w="9525" cap="flat" cmpd="sng" algn="ctr">
                       <a:solidFill>
                         <a:srgbClr val="E0D7EC"/>
@@ -7890,7 +8455,7 @@
                     <a:bodyPr/>
                     <a:lstStyle/>
                     <a:p>
-                      <a:pPr algn="ctr" indent="0" marL="0">
+                      <a:pPr marL="0" indent="0" algn="ctr">
                         <a:buNone/>
                       </a:pPr>
                       <a:r>
@@ -7911,7 +8476,7 @@
                       </a:endParaRPr>
                     </a:p>
                   </a:txBody>
-                  <a:tcPr marL="91440" marR="91440" marT="45720" marB="45720" anchor="ctr">
+                  <a:tcPr anchor="ctr">
                     <a:lnL w="9525" cap="flat" cmpd="sng" algn="ctr">
                       <a:solidFill>
                         <a:srgbClr val="E0D7EC"/>
@@ -7958,7 +8523,7 @@
                     <a:bodyPr/>
                     <a:lstStyle/>
                     <a:p>
-                      <a:pPr indent="0" marL="0">
+                      <a:pPr marL="0" indent="0">
                         <a:buNone/>
                       </a:pPr>
                       <a:endParaRPr lang="en-US" sz="1200" dirty="0">
@@ -7968,7 +8533,7 @@
                       </a:endParaRPr>
                     </a:p>
                   </a:txBody>
-                  <a:tcPr marL="91440" marR="91440" marT="45720" marB="45720" anchor="ctr">
+                  <a:tcPr anchor="ctr">
                     <a:lnL w="9525" cap="flat" cmpd="sng" algn="ctr">
                       <a:solidFill>
                         <a:srgbClr val="E0D7EC"/>
@@ -8015,7 +8580,7 @@
                     <a:bodyPr/>
                     <a:lstStyle/>
                     <a:p>
-                      <a:pPr algn="ctr" indent="0" marL="0">
+                      <a:pPr marL="0" indent="0" algn="ctr">
                         <a:buNone/>
                       </a:pPr>
                       <a:r>
@@ -8036,7 +8601,7 @@
                       </a:endParaRPr>
                     </a:p>
                   </a:txBody>
-                  <a:tcPr marL="91440" marR="91440" marT="45720" marB="45720" anchor="ctr">
+                  <a:tcPr anchor="ctr">
                     <a:lnL w="9525" cap="flat" cmpd="sng" algn="ctr">
                       <a:solidFill>
                         <a:srgbClr val="E0D7EC"/>
@@ -8083,7 +8648,7 @@
                     <a:bodyPr/>
                     <a:lstStyle/>
                     <a:p>
-                      <a:pPr algn="ctr" indent="0" marL="0">
+                      <a:pPr marL="0" indent="0" algn="ctr">
                         <a:buNone/>
                       </a:pPr>
                       <a:r>
@@ -8104,7 +8669,7 @@
                       </a:endParaRPr>
                     </a:p>
                   </a:txBody>
-                  <a:tcPr marL="91440" marR="91440" marT="45720" marB="45720" anchor="ctr">
+                  <a:tcPr anchor="ctr">
                     <a:lnL w="9525" cap="flat" cmpd="sng" algn="ctr">
                       <a:solidFill>
                         <a:srgbClr val="E0D7EC"/>
@@ -8146,6 +8711,11 @@
                     </a:solidFill>
                   </a:tcPr>
                 </a:tc>
+                <a:extLst>
+                  <a:ext uri="{0D108BD9-81ED-4DB2-BD59-A6C34878D82A}">
+                    <a16:rowId xmlns:a16="http://schemas.microsoft.com/office/drawing/2014/main" val="10003"/>
+                  </a:ext>
+                </a:extLst>
               </a:tr>
             </a:tbl>
           </a:graphicData>
@@ -8172,7 +8742,7 @@
           <a:bodyPr wrap="square" lIns="0" tIns="0" rIns="0" bIns="0" rtlCol="0" anchor="ctr"/>
           <a:lstStyle/>
           <a:p>
-            <a:pPr indent="0" marL="0">
+            <a:pPr marL="0" indent="0">
               <a:buNone/>
             </a:pPr>
             <a:r>
@@ -8216,6 +8786,13 @@
             <a:prstDash val="solid"/>
           </a:ln>
         </p:spPr>
+        <p:txBody>
+          <a:bodyPr/>
+          <a:lstStyle/>
+          <a:p>
+            <a:endParaRPr lang="en-IN"/>
+          </a:p>
+        </p:txBody>
       </p:sp>
       <p:sp>
         <p:nvSpPr>
@@ -8236,17 +8813,24 @@
           </a:solidFill>
           <a:ln/>
         </p:spPr>
+        <p:txBody>
+          <a:bodyPr/>
+          <a:lstStyle/>
+          <a:p>
+            <a:endParaRPr lang="en-IN"/>
+          </a:p>
+        </p:txBody>
       </p:sp>
       <p:pic>
         <p:nvPicPr>
-          <p:cNvPr id="14" name="Image 1" descr="/home/claude/icons/dollar_white.png">    </p:cNvPr>
+          <p:cNvPr id="14" name="Image 1" descr="/home/claude/icons/dollar_white.png"/>
           <p:cNvPicPr>
             <a:picLocks noChangeAspect="1"/>
           </p:cNvPicPr>
           <p:nvPr/>
         </p:nvPicPr>
         <p:blipFill>
-          <a:blip r:embed="rId2"/>
+          <a:blip r:embed="rId3"/>
           <a:stretch>
             <a:fillRect/>
           </a:stretch>
@@ -8282,7 +8866,7 @@
           <a:bodyPr wrap="square" lIns="0" tIns="0" rIns="0" bIns="0" rtlCol="0" anchor="ctr"/>
           <a:lstStyle/>
           <a:p>
-            <a:pPr indent="0" marL="0">
+            <a:pPr marL="0" indent="0">
               <a:buNone/>
             </a:pPr>
             <a:r>
@@ -8321,7 +8905,61 @@
           <a:bodyPr wrap="square" lIns="0" tIns="0" rIns="0" bIns="0" rtlCol="0" anchor="ctr"/>
           <a:lstStyle/>
           <a:p>
-            <a:pPr indent="0" marL="0">
+            <a:r>
+              <a:rPr lang="en-US" sz="900" dirty="0">
+                <a:solidFill>
+                  <a:srgbClr val="4A4A4A"/>
+                </a:solidFill>
+                <a:latin typeface="Calibri" pitchFamily="34" charset="0"/>
+                <a:ea typeface="Calibri" pitchFamily="34" charset="-122"/>
+                <a:cs typeface="Calibri" pitchFamily="34" charset="-120"/>
+              </a:rPr>
+              <a:t> (4 DIUs × 72 </a:t>
+            </a:r>
+            <a:r>
+              <a:rPr lang="en-US" sz="900" dirty="0" err="1">
+                <a:solidFill>
+                  <a:srgbClr val="4A4A4A"/>
+                </a:solidFill>
+                <a:latin typeface="Calibri" pitchFamily="34" charset="0"/>
+                <a:ea typeface="Calibri" pitchFamily="34" charset="-122"/>
+                <a:cs typeface="Calibri" pitchFamily="34" charset="-120"/>
+              </a:rPr>
+              <a:t>hrs</a:t>
+            </a:r>
+            <a:r>
+              <a:rPr lang="en-US" sz="900" dirty="0">
+                <a:solidFill>
+                  <a:srgbClr val="4A4A4A"/>
+                </a:solidFill>
+                <a:latin typeface="Calibri" pitchFamily="34" charset="0"/>
+                <a:ea typeface="Calibri" pitchFamily="34" charset="-122"/>
+                <a:cs typeface="Calibri" pitchFamily="34" charset="-120"/>
+              </a:rPr>
+              <a:t>)  = 288 DIU-hrs × $0.25/DIU-</a:t>
+            </a:r>
+            <a:r>
+              <a:rPr lang="en-US" sz="900" dirty="0" err="1">
+                <a:solidFill>
+                  <a:srgbClr val="4A4A4A"/>
+                </a:solidFill>
+                <a:latin typeface="Calibri" pitchFamily="34" charset="0"/>
+                <a:ea typeface="Calibri" pitchFamily="34" charset="-122"/>
+                <a:cs typeface="Calibri" pitchFamily="34" charset="-120"/>
+              </a:rPr>
+              <a:t>hr</a:t>
+            </a:r>
+            <a:endParaRPr lang="en-US" sz="900" dirty="0">
+              <a:solidFill>
+                <a:srgbClr val="4A4A4A"/>
+              </a:solidFill>
+              <a:latin typeface="Calibri" pitchFamily="34" charset="0"/>
+              <a:ea typeface="Calibri" pitchFamily="34" charset="-122"/>
+              <a:cs typeface="Calibri" pitchFamily="34" charset="-120"/>
+            </a:endParaRPr>
+          </a:p>
+          <a:p>
+            <a:pPr marL="0" indent="0">
               <a:buNone/>
             </a:pPr>
             <a:r>
@@ -8333,7 +8971,7 @@
                 <a:ea typeface="Calibri" pitchFamily="34" charset="-122"/>
                 <a:cs typeface="Calibri" pitchFamily="34" charset="-120"/>
               </a:rPr>
-              <a:t>288 DIU-hrs × $0.25/DIU-hr  (4 DIUs × 72 hrs)  •  Source: Microsoft Copilot est.</a:t>
+              <a:t>•  Source: Microsoft Copilot est.</a:t>
             </a:r>
             <a:endParaRPr lang="en-US" sz="900" dirty="0"/>
           </a:p>
@@ -8360,7 +8998,7 @@
           <a:bodyPr wrap="square" lIns="0" tIns="0" rIns="0" bIns="0" rtlCol="0" anchor="ctr"/>
           <a:lstStyle/>
           <a:p>
-            <a:pPr algn="ctr" indent="0" marL="0">
+            <a:pPr marL="0" indent="0" algn="ctr">
               <a:buNone/>
             </a:pPr>
             <a:r>
@@ -8399,6 +9037,13 @@
           </a:solidFill>
           <a:ln/>
         </p:spPr>
+        <p:txBody>
+          <a:bodyPr/>
+          <a:lstStyle/>
+          <a:p>
+            <a:endParaRPr lang="en-IN"/>
+          </a:p>
+        </p:txBody>
       </p:sp>
       <p:sp>
         <p:nvSpPr>
@@ -8419,10 +9064,17 @@
           </a:solidFill>
           <a:ln/>
         </p:spPr>
+        <p:txBody>
+          <a:bodyPr/>
+          <a:lstStyle/>
+          <a:p>
+            <a:endParaRPr lang="en-IN"/>
+          </a:p>
+        </p:txBody>
       </p:sp>
       <p:pic>
         <p:nvPicPr>
-          <p:cNvPr id="20" name="Image 2" descr="/home/claude/icons/dollar_white.png">    </p:cNvPr>
+          <p:cNvPr id="20" name="Image 2" descr="/home/claude/icons/dollar_white.png"/>
           <p:cNvPicPr>
             <a:picLocks noChangeAspect="1"/>
           </p:cNvPicPr>
@@ -8465,7 +9117,7 @@
           <a:bodyPr wrap="square" lIns="0" tIns="0" rIns="0" bIns="0" rtlCol="0" anchor="ctr"/>
           <a:lstStyle/>
           <a:p>
-            <a:pPr indent="0" marL="0">
+            <a:pPr marL="0" indent="0">
               <a:buNone/>
             </a:pPr>
             <a:r>
@@ -8504,7 +9156,7 @@
           <a:bodyPr wrap="square" lIns="0" tIns="0" rIns="0" bIns="0" rtlCol="0" anchor="ctr"/>
           <a:lstStyle/>
           <a:p>
-            <a:pPr indent="0" marL="0">
+            <a:pPr marL="0" indent="0">
               <a:buNone/>
             </a:pPr>
             <a:r>
@@ -8516,7 +9168,23 @@
                 <a:ea typeface="Calibri" pitchFamily="34" charset="-122"/>
                 <a:cs typeface="Calibri" pitchFamily="34" charset="-120"/>
               </a:rPr>
-              <a:t>30 min × $25.62/hr (14-worker, on-demand)  •  Source: Databricks Genie est.</a:t>
+              <a:t>30 min × $25.62/hr (14-worker, on-demand)  </a:t>
+            </a:r>
+          </a:p>
+          <a:p>
+            <a:pPr marL="0" indent="0">
+              <a:buNone/>
+            </a:pPr>
+            <a:r>
+              <a:rPr lang="en-US" sz="900" dirty="0">
+                <a:solidFill>
+                  <a:srgbClr val="EFE2F8"/>
+                </a:solidFill>
+                <a:latin typeface="Calibri" pitchFamily="34" charset="0"/>
+                <a:ea typeface="Calibri" pitchFamily="34" charset="-122"/>
+                <a:cs typeface="Calibri" pitchFamily="34" charset="-120"/>
+              </a:rPr>
+              <a:t>•  Source: Databricks Genie est.</a:t>
             </a:r>
             <a:endParaRPr lang="en-US" sz="900" dirty="0"/>
           </a:p>
@@ -8543,7 +9211,7 @@
           <a:bodyPr wrap="square" lIns="0" tIns="0" rIns="0" bIns="0" rtlCol="0" anchor="ctr"/>
           <a:lstStyle/>
           <a:p>
-            <a:pPr indent="0" marL="0">
+            <a:pPr marL="0" indent="0">
               <a:buNone/>
             </a:pPr>
             <a:r>
@@ -8582,7 +9250,7 @@
           <a:bodyPr wrap="square" lIns="0" tIns="0" rIns="0" bIns="0" rtlCol="0" anchor="ctr"/>
           <a:lstStyle/>
           <a:p>
-            <a:pPr algn="ctr" indent="0" marL="0">
+            <a:pPr marL="0" indent="0" algn="ctr">
               <a:buNone/>
             </a:pPr>
             <a:r>
@@ -8621,7 +9289,7 @@
           <a:bodyPr wrap="square" lIns="0" tIns="0" rIns="0" bIns="0" rtlCol="0" anchor="ctr"/>
           <a:lstStyle/>
           <a:p>
-            <a:pPr indent="0" marL="0">
+            <a:pPr marL="0" indent="0">
               <a:buNone/>
             </a:pPr>
             <a:r>
@@ -8660,7 +9328,7 @@
           <a:bodyPr wrap="square" lIns="0" tIns="0" rIns="0" bIns="0" rtlCol="0" anchor="ctr"/>
           <a:lstStyle/>
           <a:p>
-            <a:pPr algn="r" indent="0" marL="0">
+            <a:pPr marL="0" indent="0" algn="r">
               <a:buNone/>
             </a:pPr>
             <a:r>
@@ -8699,7 +9367,7 @@
           <a:bodyPr wrap="square" lIns="0" tIns="0" rIns="0" bIns="0" rtlCol="0" anchor="ctr"/>
           <a:lstStyle/>
           <a:p>
-            <a:pPr algn="r" indent="0" marL="0">
+            <a:pPr marL="0" indent="0" algn="r">
               <a:buNone/>
             </a:pPr>
             <a:r>
@@ -9018,4 +9686,319 @@
     </a:ext>
   </a:extLst>
 </a:theme>
+</file>
+
+<file path=ppt/theme/theme2.xml><?xml version="1.0" encoding="utf-8"?>
+<a:theme xmlns:a="http://schemas.openxmlformats.org/drawingml/2006/main" name="Office Theme">
+  <a:themeElements>
+    <a:clrScheme name="Office">
+      <a:dk1>
+        <a:sysClr val="windowText" lastClr="000000"/>
+      </a:dk1>
+      <a:lt1>
+        <a:sysClr val="window" lastClr="FFFFFF"/>
+      </a:lt1>
+      <a:dk2>
+        <a:srgbClr val="0E2841"/>
+      </a:dk2>
+      <a:lt2>
+        <a:srgbClr val="E8E8E8"/>
+      </a:lt2>
+      <a:accent1>
+        <a:srgbClr val="156082"/>
+      </a:accent1>
+      <a:accent2>
+        <a:srgbClr val="E97132"/>
+      </a:accent2>
+      <a:accent3>
+        <a:srgbClr val="196B24"/>
+      </a:accent3>
+      <a:accent4>
+        <a:srgbClr val="0F9ED5"/>
+      </a:accent4>
+      <a:accent5>
+        <a:srgbClr val="A02B93"/>
+      </a:accent5>
+      <a:accent6>
+        <a:srgbClr val="4EA72E"/>
+      </a:accent6>
+      <a:hlink>
+        <a:srgbClr val="467886"/>
+      </a:hlink>
+      <a:folHlink>
+        <a:srgbClr val="96607D"/>
+      </a:folHlink>
+    </a:clrScheme>
+    <a:fontScheme name="Office">
+      <a:majorFont>
+        <a:latin typeface="Aptos Display" panose="02110004020202020204"/>
+        <a:ea typeface=""/>
+        <a:cs typeface=""/>
+        <a:font script="Jpan" typeface="游ゴシック Light"/>
+        <a:font script="Hang" typeface="맑은 고딕"/>
+        <a:font script="Hans" typeface="等线 Light"/>
+        <a:font script="Hant" typeface="新細明體"/>
+        <a:font script="Arab" typeface="Times New Roman"/>
+        <a:font script="Hebr" typeface="Times New Roman"/>
+        <a:font script="Thai" typeface="Angsana New"/>
+        <a:font script="Ethi" typeface="Nyala"/>
+        <a:font script="Beng" typeface="Vrinda"/>
+        <a:font script="Gujr" typeface="Shruti"/>
+        <a:font script="Khmr" typeface="MoolBoran"/>
+        <a:font script="Knda" typeface="Tunga"/>
+        <a:font script="Guru" typeface="Raavi"/>
+        <a:font script="Cans" typeface="Euphemia"/>
+        <a:font script="Cher" typeface="Plantagenet Cherokee"/>
+        <a:font script="Yiii" typeface="Microsoft Yi Baiti"/>
+        <a:font script="Tibt" typeface="Microsoft Himalaya"/>
+        <a:font script="Thaa" typeface="MV Boli"/>
+        <a:font script="Deva" typeface="Mangal"/>
+        <a:font script="Telu" typeface="Gautami"/>
+        <a:font script="Taml" typeface="Latha"/>
+        <a:font script="Syrc" typeface="Estrangelo Edessa"/>
+        <a:font script="Orya" typeface="Kalinga"/>
+        <a:font script="Mlym" typeface="Kartika"/>
+        <a:font script="Laoo" typeface="DokChampa"/>
+        <a:font script="Sinh" typeface="Iskoola Pota"/>
+        <a:font script="Mong" typeface="Mongolian Baiti"/>
+        <a:font script="Viet" typeface="Times New Roman"/>
+        <a:font script="Uigh" typeface="Microsoft Uighur"/>
+        <a:font script="Geor" typeface="Sylfaen"/>
+        <a:font script="Armn" typeface="Arial"/>
+        <a:font script="Bugi" typeface="Leelawadee UI"/>
+        <a:font script="Bopo" typeface="Microsoft JhengHei"/>
+        <a:font script="Java" typeface="Javanese Text"/>
+        <a:font script="Lisu" typeface="Segoe UI"/>
+        <a:font script="Mymr" typeface="Myanmar Text"/>
+        <a:font script="Nkoo" typeface="Ebrima"/>
+        <a:font script="Olck" typeface="Nirmala UI"/>
+        <a:font script="Osma" typeface="Ebrima"/>
+        <a:font script="Phag" typeface="Phagspa"/>
+        <a:font script="Syrn" typeface="Estrangelo Edessa"/>
+        <a:font script="Syrj" typeface="Estrangelo Edessa"/>
+        <a:font script="Syre" typeface="Estrangelo Edessa"/>
+        <a:font script="Sora" typeface="Nirmala UI"/>
+        <a:font script="Tale" typeface="Microsoft Tai Le"/>
+        <a:font script="Talu" typeface="Microsoft New Tai Lue"/>
+        <a:font script="Tfng" typeface="Ebrima"/>
+      </a:majorFont>
+      <a:minorFont>
+        <a:latin typeface="Aptos" panose="02110004020202020204"/>
+        <a:ea typeface=""/>
+        <a:cs typeface=""/>
+        <a:font script="Jpan" typeface="游ゴシック"/>
+        <a:font script="Hang" typeface="맑은 고딕"/>
+        <a:font script="Hans" typeface="等线"/>
+        <a:font script="Hant" typeface="新細明體"/>
+        <a:font script="Arab" typeface="Arial"/>
+        <a:font script="Hebr" typeface="Arial"/>
+        <a:font script="Thai" typeface="Cordia New"/>
+        <a:font script="Ethi" typeface="Nyala"/>
+        <a:font script="Beng" typeface="Vrinda"/>
+        <a:font script="Gujr" typeface="Shruti"/>
+        <a:font script="Khmr" typeface="DaunPenh"/>
+        <a:font script="Knda" typeface="Tunga"/>
+        <a:font script="Guru" typeface="Raavi"/>
+        <a:font script="Cans" typeface="Euphemia"/>
+        <a:font script="Cher" typeface="Plantagenet Cherokee"/>
+        <a:font script="Yiii" typeface="Microsoft Yi Baiti"/>
+        <a:font script="Tibt" typeface="Microsoft Himalaya"/>
+        <a:font script="Thaa" typeface="MV Boli"/>
+        <a:font script="Deva" typeface="Mangal"/>
+        <a:font script="Telu" typeface="Gautami"/>
+        <a:font script="Taml" typeface="Latha"/>
+        <a:font script="Syrc" typeface="Estrangelo Edessa"/>
+        <a:font script="Orya" typeface="Kalinga"/>
+        <a:font script="Mlym" typeface="Kartika"/>
+        <a:font script="Laoo" typeface="DokChampa"/>
+        <a:font script="Sinh" typeface="Iskoola Pota"/>
+        <a:font script="Mong" typeface="Mongolian Baiti"/>
+        <a:font script="Viet" typeface="Arial"/>
+        <a:font script="Uigh" typeface="Microsoft Uighur"/>
+        <a:font script="Geor" typeface="Sylfaen"/>
+        <a:font script="Armn" typeface="Arial"/>
+        <a:font script="Bugi" typeface="Leelawadee UI"/>
+        <a:font script="Bopo" typeface="Microsoft JhengHei"/>
+        <a:font script="Java" typeface="Javanese Text"/>
+        <a:font script="Lisu" typeface="Segoe UI"/>
+        <a:font script="Mymr" typeface="Myanmar Text"/>
+        <a:font script="Nkoo" typeface="Ebrima"/>
+        <a:font script="Olck" typeface="Nirmala UI"/>
+        <a:font script="Osma" typeface="Ebrima"/>
+        <a:font script="Phag" typeface="Phagspa"/>
+        <a:font script="Syrn" typeface="Estrangelo Edessa"/>
+        <a:font script="Syrj" typeface="Estrangelo Edessa"/>
+        <a:font script="Syre" typeface="Estrangelo Edessa"/>
+        <a:font script="Sora" typeface="Nirmala UI"/>
+        <a:font script="Tale" typeface="Microsoft Tai Le"/>
+        <a:font script="Talu" typeface="Microsoft New Tai Lue"/>
+        <a:font script="Tfng" typeface="Ebrima"/>
+      </a:minorFont>
+    </a:fontScheme>
+    <a:fmtScheme name="Office">
+      <a:fillStyleLst>
+        <a:solidFill>
+          <a:schemeClr val="phClr"/>
+        </a:solidFill>
+        <a:gradFill rotWithShape="1">
+          <a:gsLst>
+            <a:gs pos="0">
+              <a:schemeClr val="phClr">
+                <a:lumMod val="110000"/>
+                <a:satMod val="105000"/>
+                <a:tint val="67000"/>
+              </a:schemeClr>
+            </a:gs>
+            <a:gs pos="50000">
+              <a:schemeClr val="phClr">
+                <a:lumMod val="105000"/>
+                <a:satMod val="103000"/>
+                <a:tint val="73000"/>
+              </a:schemeClr>
+            </a:gs>
+            <a:gs pos="100000">
+              <a:schemeClr val="phClr">
+                <a:lumMod val="105000"/>
+                <a:satMod val="109000"/>
+                <a:tint val="81000"/>
+              </a:schemeClr>
+            </a:gs>
+          </a:gsLst>
+          <a:lin ang="5400000" scaled="0"/>
+        </a:gradFill>
+        <a:gradFill rotWithShape="1">
+          <a:gsLst>
+            <a:gs pos="0">
+              <a:schemeClr val="phClr">
+                <a:satMod val="103000"/>
+                <a:lumMod val="102000"/>
+                <a:tint val="94000"/>
+              </a:schemeClr>
+            </a:gs>
+            <a:gs pos="50000">
+              <a:schemeClr val="phClr">
+                <a:satMod val="110000"/>
+                <a:lumMod val="100000"/>
+                <a:shade val="100000"/>
+              </a:schemeClr>
+            </a:gs>
+            <a:gs pos="100000">
+              <a:schemeClr val="phClr">
+                <a:lumMod val="99000"/>
+                <a:satMod val="120000"/>
+                <a:shade val="78000"/>
+              </a:schemeClr>
+            </a:gs>
+          </a:gsLst>
+          <a:lin ang="5400000" scaled="0"/>
+        </a:gradFill>
+      </a:fillStyleLst>
+      <a:lnStyleLst>
+        <a:ln w="12700" cap="flat" cmpd="sng" algn="ctr">
+          <a:solidFill>
+            <a:schemeClr val="phClr"/>
+          </a:solidFill>
+          <a:prstDash val="solid"/>
+          <a:miter lim="800000"/>
+        </a:ln>
+        <a:ln w="19050" cap="flat" cmpd="sng" algn="ctr">
+          <a:solidFill>
+            <a:schemeClr val="phClr"/>
+          </a:solidFill>
+          <a:prstDash val="solid"/>
+          <a:miter lim="800000"/>
+        </a:ln>
+        <a:ln w="25400" cap="flat" cmpd="sng" algn="ctr">
+          <a:solidFill>
+            <a:schemeClr val="phClr"/>
+          </a:solidFill>
+          <a:prstDash val="solid"/>
+          <a:miter lim="800000"/>
+        </a:ln>
+      </a:lnStyleLst>
+      <a:effectStyleLst>
+        <a:effectStyle>
+          <a:effectLst/>
+        </a:effectStyle>
+        <a:effectStyle>
+          <a:effectLst/>
+        </a:effectStyle>
+        <a:effectStyle>
+          <a:effectLst>
+            <a:outerShdw blurRad="57150" dist="19050" dir="5400000" algn="ctr" rotWithShape="0">
+              <a:srgbClr val="000000">
+                <a:alpha val="63000"/>
+              </a:srgbClr>
+            </a:outerShdw>
+          </a:effectLst>
+        </a:effectStyle>
+      </a:effectStyleLst>
+      <a:bgFillStyleLst>
+        <a:solidFill>
+          <a:schemeClr val="phClr"/>
+        </a:solidFill>
+        <a:solidFill>
+          <a:schemeClr val="phClr">
+            <a:tint val="95000"/>
+            <a:satMod val="170000"/>
+          </a:schemeClr>
+        </a:solidFill>
+        <a:gradFill rotWithShape="1">
+          <a:gsLst>
+            <a:gs pos="0">
+              <a:schemeClr val="phClr">
+                <a:tint val="93000"/>
+                <a:satMod val="150000"/>
+                <a:shade val="98000"/>
+                <a:lumMod val="102000"/>
+              </a:schemeClr>
+            </a:gs>
+            <a:gs pos="50000">
+              <a:schemeClr val="phClr">
+                <a:tint val="98000"/>
+                <a:satMod val="130000"/>
+                <a:shade val="90000"/>
+                <a:lumMod val="103000"/>
+              </a:schemeClr>
+            </a:gs>
+            <a:gs pos="100000">
+              <a:schemeClr val="phClr">
+                <a:shade val="63000"/>
+                <a:satMod val="120000"/>
+              </a:schemeClr>
+            </a:gs>
+          </a:gsLst>
+          <a:lin ang="5400000" scaled="0"/>
+        </a:gradFill>
+      </a:bgFillStyleLst>
+    </a:fmtScheme>
+  </a:themeElements>
+  <a:objectDefaults>
+    <a:lnDef>
+      <a:spPr/>
+      <a:bodyPr/>
+      <a:lstStyle/>
+      <a:style>
+        <a:lnRef idx="2">
+          <a:schemeClr val="accent1"/>
+        </a:lnRef>
+        <a:fillRef idx="0">
+          <a:schemeClr val="accent1"/>
+        </a:fillRef>
+        <a:effectRef idx="1">
+          <a:schemeClr val="accent1"/>
+        </a:effectRef>
+        <a:fontRef idx="minor">
+          <a:schemeClr val="tx1"/>
+        </a:fontRef>
+      </a:style>
+    </a:lnDef>
+  </a:objectDefaults>
+  <a:extraClrSchemeLst/>
+  <a:extLst>
+    <a:ext uri="{05A4C25C-085E-4340-85A3-A5531E510DB2}">
+      <thm15:themeFamily xmlns:thm15="http://schemas.microsoft.com/office/thememl/2012/main" name="Office Theme" id="{2E142A2C-CD16-42D6-873A-C26D2A0506FA}" vid="{1BDDFF52-6CD6-40A5-AB3C-68EB2F1E4D0A}"/>
+    </a:ext>
+  </a:extLst>
+</a:theme>
 </file>